--- a/Presentation.pptx
+++ b/Presentation.pptx
@@ -4,6 +4,9 @@
   <p:sldMasterIdLst>
     <p:sldMasterId id="2147483648" r:id="rId1"/>
   </p:sldMasterIdLst>
+  <p:notesMasterIdLst>
+    <p:notesMasterId r:id="rId16"/>
+  </p:notesMasterIdLst>
   <p:sldIdLst>
     <p:sldId id="256" r:id="rId2"/>
     <p:sldId id="257" r:id="rId3"/>
@@ -20,10 +23,7 @@
     <p:sldId id="268" r:id="rId14"/>
     <p:sldId id="269" r:id="rId15"/>
   </p:sldIdLst>
-  <p:notesMasterIdLst>
-    <p:notesMasterId r:id="rId16"/>
-  </p:notesMasterIdLst>
-  <p:sldSz cx="9144000" cy="5143500"/>
+  <p:sldSz cx="9144000" cy="5143500" type="screen16x9"/>
   <p:notesSz cx="5143500" cy="9144000"/>
   <p:defaultTextStyle>
     <a:lvl1pPr marL="0" algn="l" defTabSz="914400" rtl="0" eaLnBrk="1" latinLnBrk="0" hangingPunct="1">
@@ -117,6 +117,11 @@
       </a:defRPr>
     </a:lvl9pPr>
   </p:defaultTextStyle>
+  <p:extLst>
+    <p:ext uri="{EFAFB233-063F-42B5-8137-9DF3F51BA10A}">
+      <p15:sldGuideLst xmlns:p15="http://schemas.microsoft.com/office/powerpoint/2012/main"/>
+    </p:ext>
+  </p:extLst>
 </p:presentation>
 </file>
 
@@ -142,234 +147,10 @@
           <a:chExt cx="0" cy="0"/>
         </a:xfrm>
       </p:grpSpPr>
-      <p:sp>
-        <p:nvSpPr>
-          <p:cNvPr id="2" name="Header Placeholder 1"/>
-          <p:cNvSpPr>
-            <a:spLocks noGrp="1"/>
-          </p:cNvSpPr>
-          <p:nvPr>
-            <p:ph type="hdr" sz="quarter"/>
-          </p:nvPr>
-        </p:nvSpPr>
-        <p:spPr>
-          <a:xfrm>
-            <a:off x="0" y="0"/>
-            <a:ext cx="2971800" cy="458788"/>
-          </a:xfrm>
-          <a:prstGeom prst="rect">
-            <a:avLst/>
-          </a:prstGeom>
-        </p:spPr>
-        <p:txBody>
-          <a:bodyPr vert="horz" lIns="91440" tIns="45720" rIns="91440" bIns="45720" rtlCol="0"/>
-          <a:lstStyle>
-            <a:lvl1pPr algn="l">
-              <a:defRPr sz="1200"/>
-            </a:lvl1pPr>
-          </a:lstStyle>
-          <a:p>
-            <a:endParaRPr lang="en-US"/>
-          </a:p>
-        </p:txBody>
-      </p:sp>
-      <p:sp>
-        <p:nvSpPr>
-          <p:cNvPr id="3" name="Date Placeholder 2"/>
-          <p:cNvSpPr>
-            <a:spLocks noGrp="1"/>
-          </p:cNvSpPr>
-          <p:nvPr>
-            <p:ph type="dt" idx="1"/>
-          </p:nvPr>
-        </p:nvSpPr>
-        <p:spPr>
-          <a:xfrm>
-            <a:off x="3884613" y="0"/>
-            <a:ext cx="2971800" cy="458788"/>
-          </a:xfrm>
-          <a:prstGeom prst="rect">
-            <a:avLst/>
-          </a:prstGeom>
-        </p:spPr>
-        <p:txBody>
-          <a:bodyPr vert="horz" lIns="91440" tIns="45720" rIns="91440" bIns="45720" rtlCol="0"/>
-          <a:lstStyle>
-            <a:lvl1pPr algn="r">
-              <a:defRPr sz="1200"/>
-            </a:lvl1pPr>
-          </a:lstStyle>
-          <a:p>
-            <a:fld id="{5282F153-3F37-0F45-9E97-73ACFA13230C}" type="datetimeFigureOut">
-              <a:rPr lang="en-US"/>
-              <a:t>7/23/19</a:t>
-            </a:fld>
-            <a:endParaRPr lang="en-US"/>
-          </a:p>
-        </p:txBody>
-      </p:sp>
-      <p:sp>
-        <p:nvSpPr>
-          <p:cNvPr id="4" name="Slide Image Placeholder 3"/>
-          <p:cNvSpPr>
-            <a:spLocks noGrp="1" noRot="1" noChangeAspect="1"/>
-          </p:cNvSpPr>
-          <p:nvPr>
-            <p:ph type="sldImg" idx="2"/>
-          </p:nvPr>
-        </p:nvSpPr>
-        <p:spPr>
-          <a:xfrm>
-            <a:off x="685800" y="1143000"/>
-            <a:ext cx="5486400" cy="3086100"/>
-          </a:xfrm>
-          <a:prstGeom prst="rect">
-            <a:avLst/>
-          </a:prstGeom>
-          <a:noFill/>
-          <a:ln w="12700">
-            <a:solidFill>
-              <a:prstClr val="black"/>
-            </a:solidFill>
-          </a:ln>
-        </p:spPr>
-        <p:txBody>
-          <a:bodyPr vert="horz" lIns="91440" tIns="45720" rIns="91440" bIns="45720" rtlCol="0" anchor="ctr"/>
-          <a:lstStyle/>
-          <a:p>
-            <a:endParaRPr lang="en-US"/>
-          </a:p>
-        </p:txBody>
-      </p:sp>
-      <p:sp>
-        <p:nvSpPr>
-          <p:cNvPr id="5" name="Notes Placeholder 4"/>
-          <p:cNvSpPr>
-            <a:spLocks noGrp="1"/>
-          </p:cNvSpPr>
-          <p:nvPr>
-            <p:ph type="body" sz="quarter" idx="3"/>
-          </p:nvPr>
-        </p:nvSpPr>
-        <p:spPr>
-          <a:xfrm>
-            <a:off x="685800" y="4400550"/>
-            <a:ext cx="5486400" cy="3600450"/>
-          </a:xfrm>
-          <a:prstGeom prst="rect">
-            <a:avLst/>
-          </a:prstGeom>
-        </p:spPr>
-        <p:txBody>
-          <a:bodyPr vert="horz" lIns="91440" tIns="45720" rIns="91440" bIns="45720" rtlCol="0"/>
-          <a:lstStyle/>
-          <a:p>
-            <a:pPr lvl="0"/>
-            <a:r>
-              <a:rPr lang="en-US"/>
-              <a:t>Click to edit Master text styles</a:t>
-            </a:r>
-          </a:p>
-          <a:p>
-            <a:pPr lvl="1"/>
-            <a:r>
-              <a:rPr lang="en-US"/>
-              <a:t>Second level</a:t>
-            </a:r>
-          </a:p>
-          <a:p>
-            <a:pPr lvl="2"/>
-            <a:r>
-              <a:rPr lang="en-US"/>
-              <a:t>Third level</a:t>
-            </a:r>
-          </a:p>
-          <a:p>
-            <a:pPr lvl="3"/>
-            <a:r>
-              <a:rPr lang="en-US"/>
-              <a:t>Fourth level</a:t>
-            </a:r>
-          </a:p>
-          <a:p>
-            <a:pPr lvl="4"/>
-            <a:r>
-              <a:rPr lang="en-US"/>
-              <a:t>Fifth level</a:t>
-            </a:r>
-          </a:p>
-        </p:txBody>
-      </p:sp>
-      <p:sp>
-        <p:nvSpPr>
-          <p:cNvPr id="6" name="Footer Placeholder 5"/>
-          <p:cNvSpPr>
-            <a:spLocks noGrp="1"/>
-          </p:cNvSpPr>
-          <p:nvPr>
-            <p:ph type="ftr" sz="quarter" idx="4"/>
-          </p:nvPr>
-        </p:nvSpPr>
-        <p:spPr>
-          <a:xfrm>
-            <a:off x="0" y="8685213"/>
-            <a:ext cx="2971800" cy="458787"/>
-          </a:xfrm>
-          <a:prstGeom prst="rect">
-            <a:avLst/>
-          </a:prstGeom>
-        </p:spPr>
-        <p:txBody>
-          <a:bodyPr vert="horz" lIns="91440" tIns="45720" rIns="91440" bIns="45720" rtlCol="0" anchor="b"/>
-          <a:lstStyle>
-            <a:lvl1pPr algn="l">
-              <a:defRPr sz="1200"/>
-            </a:lvl1pPr>
-          </a:lstStyle>
-          <a:p>
-            <a:endParaRPr lang="en-US"/>
-          </a:p>
-        </p:txBody>
-      </p:sp>
-      <p:sp>
-        <p:nvSpPr>
-          <p:cNvPr id="7" name="Slide Number Placeholder 6"/>
-          <p:cNvSpPr>
-            <a:spLocks noGrp="1"/>
-          </p:cNvSpPr>
-          <p:nvPr>
-            <p:ph type="sldNum" sz="quarter" idx="5"/>
-          </p:nvPr>
-        </p:nvSpPr>
-        <p:spPr>
-          <a:xfrm>
-            <a:off x="3884613" y="8685213"/>
-            <a:ext cx="2971800" cy="458787"/>
-          </a:xfrm>
-          <a:prstGeom prst="rect">
-            <a:avLst/>
-          </a:prstGeom>
-        </p:spPr>
-        <p:txBody>
-          <a:bodyPr vert="horz" lIns="91440" tIns="45720" rIns="91440" bIns="45720" rtlCol="0" anchor="b"/>
-          <a:lstStyle>
-            <a:lvl1pPr algn="r">
-              <a:defRPr sz="1200"/>
-            </a:lvl1pPr>
-          </a:lstStyle>
-          <a:p>
-            <a:fld id="{CE5E9CC1-C706-0F49-92D6-E571CC5EEA8F}" type="slidenum">
-              <a:rPr lang="en-US"/>
-              <a:t>‹#›</a:t>
-            </a:fld>
-            <a:endParaRPr lang="en-US"/>
-          </a:p>
-        </p:txBody>
-      </p:sp>
     </p:spTree>
     <p:extLst>
       <p:ext uri="{BB962C8B-B14F-4D97-AF65-F5344CB8AC3E}">
-        <p14:creationId xmlns:p14="http://schemas.microsoft.com/office/powerpoint/2010/main" val="1024086991"/>
+        <p14:creationId xmlns:p14="http://schemas.microsoft.com/office/powerpoint/2010/main" val="2460012755"/>
       </p:ext>
     </p:extLst>
   </p:cSld>
@@ -513,10 +294,6 @@
           <a:bodyPr/>
           <a:lstStyle/>
           <a:p>
-            <a:r>
-              <a:rPr lang="en-US" dirty="0"/>
-              <a:t/>
-            </a:r>
             <a:endParaRPr lang="en-US" dirty="0"/>
           </a:p>
         </p:txBody>
@@ -601,10 +378,6 @@
           <a:bodyPr/>
           <a:lstStyle/>
           <a:p>
-            <a:r>
-              <a:rPr lang="en-US" dirty="0"/>
-              <a:t/>
-            </a:r>
             <a:endParaRPr lang="en-US" dirty="0"/>
           </a:p>
         </p:txBody>
@@ -689,10 +462,6 @@
           <a:bodyPr/>
           <a:lstStyle/>
           <a:p>
-            <a:r>
-              <a:rPr lang="en-US" dirty="0"/>
-              <a:t/>
-            </a:r>
             <a:endParaRPr lang="en-US" dirty="0"/>
           </a:p>
         </p:txBody>
@@ -777,10 +546,6 @@
           <a:bodyPr/>
           <a:lstStyle/>
           <a:p>
-            <a:r>
-              <a:rPr lang="en-US" dirty="0"/>
-              <a:t/>
-            </a:r>
             <a:endParaRPr lang="en-US" dirty="0"/>
           </a:p>
         </p:txBody>
@@ -865,10 +630,6 @@
           <a:bodyPr/>
           <a:lstStyle/>
           <a:p>
-            <a:r>
-              <a:rPr lang="en-US" dirty="0"/>
-              <a:t/>
-            </a:r>
             <a:endParaRPr lang="en-US" dirty="0"/>
           </a:p>
         </p:txBody>
@@ -953,10 +714,6 @@
           <a:bodyPr/>
           <a:lstStyle/>
           <a:p>
-            <a:r>
-              <a:rPr lang="en-US" dirty="0"/>
-              <a:t/>
-            </a:r>
             <a:endParaRPr lang="en-US" dirty="0"/>
           </a:p>
         </p:txBody>
@@ -1041,10 +798,6 @@
           <a:bodyPr/>
           <a:lstStyle/>
           <a:p>
-            <a:r>
-              <a:rPr lang="en-US" dirty="0"/>
-              <a:t/>
-            </a:r>
             <a:endParaRPr lang="en-US" dirty="0"/>
           </a:p>
         </p:txBody>
@@ -1129,10 +882,6 @@
           <a:bodyPr/>
           <a:lstStyle/>
           <a:p>
-            <a:r>
-              <a:rPr lang="en-US" dirty="0"/>
-              <a:t/>
-            </a:r>
             <a:endParaRPr lang="en-US" dirty="0"/>
           </a:p>
         </p:txBody>
@@ -1217,10 +966,6 @@
           <a:bodyPr/>
           <a:lstStyle/>
           <a:p>
-            <a:r>
-              <a:rPr lang="en-US" dirty="0"/>
-              <a:t/>
-            </a:r>
             <a:endParaRPr lang="en-US" dirty="0"/>
           </a:p>
         </p:txBody>
@@ -1305,10 +1050,6 @@
           <a:bodyPr/>
           <a:lstStyle/>
           <a:p>
-            <a:r>
-              <a:rPr lang="en-US" dirty="0"/>
-              <a:t/>
-            </a:r>
             <a:endParaRPr lang="en-US" dirty="0"/>
           </a:p>
         </p:txBody>
@@ -1393,10 +1134,6 @@
           <a:bodyPr/>
           <a:lstStyle/>
           <a:p>
-            <a:r>
-              <a:rPr lang="en-US" dirty="0"/>
-              <a:t/>
-            </a:r>
             <a:endParaRPr lang="en-US" dirty="0"/>
           </a:p>
         </p:txBody>
@@ -1481,10 +1218,6 @@
           <a:bodyPr/>
           <a:lstStyle/>
           <a:p>
-            <a:r>
-              <a:rPr lang="en-US" dirty="0"/>
-              <a:t/>
-            </a:r>
             <a:endParaRPr lang="en-US" dirty="0"/>
           </a:p>
         </p:txBody>
@@ -1569,10 +1302,6 @@
           <a:bodyPr/>
           <a:lstStyle/>
           <a:p>
-            <a:r>
-              <a:rPr lang="en-US" dirty="0"/>
-              <a:t/>
-            </a:r>
             <a:endParaRPr lang="en-US" dirty="0"/>
           </a:p>
         </p:txBody>
@@ -1657,10 +1386,6 @@
           <a:bodyPr/>
           <a:lstStyle/>
           <a:p>
-            <a:r>
-              <a:rPr lang="en-US" dirty="0"/>
-              <a:t/>
-            </a:r>
             <a:endParaRPr lang="en-US" dirty="0"/>
           </a:p>
         </p:txBody>
@@ -1734,6 +1459,11 @@
 <file path=ppt/slideMasters/slideMaster1.xml><?xml version="1.0" encoding="utf-8"?>
 <p:sldMaster xmlns:a="http://schemas.openxmlformats.org/drawingml/2006/main" xmlns:r="http://schemas.openxmlformats.org/officeDocument/2006/relationships" xmlns:p="http://schemas.openxmlformats.org/presentationml/2006/main">
   <p:cSld>
+    <p:bg>
+      <p:bgRef idx="1001">
+        <a:schemeClr val="bg1"/>
+      </p:bgRef>
+    </p:bg>
     <p:spTree>
       <p:nvGrpSpPr>
         <p:cNvPr id="1" name=""/>
@@ -2016,6 +1746,7 @@
         <a:solidFill>
           <a:srgbClr val="1E2761"/>
         </a:solidFill>
+        <a:effectLst/>
       </p:bgPr>
     </p:bg>
     <p:spTree>
@@ -2051,6 +1782,13 @@
           </a:solidFill>
           <a:ln/>
         </p:spPr>
+        <p:txBody>
+          <a:bodyPr/>
+          <a:lstStyle/>
+          <a:p>
+            <a:endParaRPr lang="en-US"/>
+          </a:p>
+        </p:txBody>
       </p:sp>
       <p:sp>
         <p:nvSpPr>
@@ -2073,11 +1811,11 @@
           <a:bodyPr wrap="square" lIns="0" tIns="0" rIns="0" bIns="0" rtlCol="0" anchor="ctr"/>
           <a:lstStyle/>
           <a:p>
-            <a:pPr indent="0" marL="0">
-              <a:buNone/>
-            </a:pPr>
-            <a:r>
-              <a:rPr lang="en-US" sz="1200" b="1" spc="600" kern="0" dirty="0">
+            <a:pPr marL="0" indent="0">
+              <a:buNone/>
+            </a:pPr>
+            <a:r>
+              <a:rPr lang="en-US" sz="1200" b="1" kern="0" spc="600" dirty="0">
                 <a:solidFill>
                   <a:srgbClr val="CADCFC"/>
                 </a:solidFill>
@@ -2112,7 +1850,7 @@
           <a:bodyPr wrap="square" lIns="0" tIns="0" rIns="0" bIns="0" rtlCol="0" anchor="ctr"/>
           <a:lstStyle/>
           <a:p>
-            <a:pPr indent="0" marL="0">
+            <a:pPr marL="0" indent="0">
               <a:buNone/>
             </a:pPr>
             <a:r>
@@ -2151,7 +1889,7 @@
           <a:bodyPr wrap="square" lIns="0" tIns="0" rIns="0" bIns="0" rtlCol="0" anchor="ctr"/>
           <a:lstStyle/>
           <a:p>
-            <a:pPr indent="0" marL="0">
+            <a:pPr marL="0" indent="0">
               <a:buNone/>
             </a:pPr>
             <a:r>
@@ -2171,14 +1909,14 @@
       </p:sp>
       <p:pic>
         <p:nvPicPr>
-          <p:cNvPr id="6" name="Image 0" descr="preencoded.png">    </p:cNvPr>
+          <p:cNvPr id="6" name="Image 0" descr="preencoded.png"/>
           <p:cNvPicPr>
             <a:picLocks noChangeAspect="1"/>
           </p:cNvPicPr>
           <p:nvPr/>
         </p:nvPicPr>
         <p:blipFill>
-          <a:blip r:embed="rId1"/>
+          <a:blip r:embed="rId3"/>
           <a:stretch>
             <a:fillRect/>
           </a:stretch>
@@ -2201,20 +1939,20 @@
         </p:nvSpPr>
         <p:spPr>
           <a:xfrm>
-            <a:off x="960120" y="3401568"/>
-            <a:ext cx="3657600" cy="411480"/>
-          </a:xfrm>
-          <a:prstGeom prst="rect">
-            <a:avLst/>
-          </a:prstGeom>
-          <a:noFill/>
-          <a:ln/>
-        </p:spPr>
-        <p:txBody>
-          <a:bodyPr wrap="square" lIns="0" tIns="0" rIns="0" bIns="0" rtlCol="0" anchor="ctr"/>
-          <a:lstStyle/>
-          <a:p>
-            <a:pPr indent="0" marL="0">
+            <a:off x="960119" y="3401568"/>
+            <a:ext cx="3886629" cy="411480"/>
+          </a:xfrm>
+          <a:prstGeom prst="rect">
+            <a:avLst/>
+          </a:prstGeom>
+          <a:noFill/>
+          <a:ln/>
+        </p:spPr>
+        <p:txBody>
+          <a:bodyPr wrap="square" lIns="0" tIns="0" rIns="0" bIns="0" rtlCol="0" anchor="ctr"/>
+          <a:lstStyle/>
+          <a:p>
+            <a:pPr marL="0" indent="0">
               <a:buNone/>
             </a:pPr>
             <a:r>
@@ -2226,7 +1964,7 @@
                 <a:ea typeface="Calibri" pitchFamily="34" charset="-122"/>
                 <a:cs typeface="Calibri" pitchFamily="34" charset="-120"/>
               </a:rPr>
-              <a:t>Presented by Kinjal T</a:t>
+              <a:t>Presented by Kush, Kinjal, Hanna, Omar, Seyfi</a:t>
             </a:r>
             <a:endParaRPr lang="en-US" sz="1600" dirty="0"/>
           </a:p>
@@ -2253,7 +1991,7 @@
           <a:bodyPr wrap="square" lIns="0" tIns="0" rIns="0" bIns="0" rtlCol="0" anchor="ctr"/>
           <a:lstStyle/>
           <a:p>
-            <a:pPr indent="0" marL="0">
+            <a:pPr marL="0" indent="0">
               <a:buNone/>
             </a:pPr>
             <a:r>
@@ -2287,6 +2025,7 @@
         <a:solidFill>
           <a:srgbClr val="FFFFFF"/>
         </a:solidFill>
+        <a:effectLst/>
       </p:bgPr>
     </p:bg>
     <p:spTree>
@@ -2324,7 +2063,7 @@
           <a:bodyPr wrap="square" lIns="0" tIns="0" rIns="0" bIns="0" rtlCol="0" anchor="ctr"/>
           <a:lstStyle/>
           <a:p>
-            <a:pPr indent="0" marL="0">
+            <a:pPr marL="0" indent="0">
               <a:buNone/>
             </a:pPr>
             <a:r>
@@ -2344,14 +2083,14 @@
       </p:sp>
       <p:pic>
         <p:nvPicPr>
-          <p:cNvPr id="3" name="Image 0" descr="/home/claude/deck-assets/risky.png">    </p:cNvPr>
+          <p:cNvPr id="3" name="Image 0" descr="/home/claude/deck-assets/risky.png"/>
           <p:cNvPicPr>
             <a:picLocks noChangeAspect="1"/>
           </p:cNvPicPr>
           <p:nvPr/>
         </p:nvPicPr>
         <p:blipFill>
-          <a:blip r:embed="rId1"/>
+          <a:blip r:embed="rId3"/>
           <a:stretch>
             <a:fillRect/>
           </a:stretch>
@@ -2385,6 +2124,13 @@
           </a:solidFill>
           <a:ln/>
         </p:spPr>
+        <p:txBody>
+          <a:bodyPr/>
+          <a:lstStyle/>
+          <a:p>
+            <a:endParaRPr lang="en-US"/>
+          </a:p>
+        </p:txBody>
       </p:sp>
       <p:sp>
         <p:nvSpPr>
@@ -2407,11 +2153,11 @@
           <a:bodyPr wrap="square" lIns="0" tIns="0" rIns="0" bIns="0" rtlCol="0" anchor="ctr"/>
           <a:lstStyle/>
           <a:p>
-            <a:pPr indent="0" marL="0">
-              <a:buNone/>
-            </a:pPr>
-            <a:r>
-              <a:rPr lang="en-US" sz="1000" b="1" spc="400" kern="0" dirty="0">
+            <a:pPr marL="0" indent="0">
+              <a:buNone/>
+            </a:pPr>
+            <a:r>
+              <a:rPr lang="en-US" sz="1000" b="1" kern="0" spc="400" dirty="0">
                 <a:solidFill>
                   <a:srgbClr val="FFFFFF"/>
                 </a:solidFill>
@@ -2446,7 +2192,7 @@
           <a:bodyPr wrap="square" lIns="0" tIns="0" rIns="0" bIns="0" rtlCol="0" anchor="ctr"/>
           <a:lstStyle/>
           <a:p>
-            <a:pPr indent="0" marL="0">
+            <a:pPr marL="0" indent="0">
               <a:buNone/>
             </a:pPr>
             <a:r>
@@ -2483,6 +2229,13 @@
           </a:solidFill>
           <a:ln/>
         </p:spPr>
+        <p:txBody>
+          <a:bodyPr/>
+          <a:lstStyle/>
+          <a:p>
+            <a:endParaRPr lang="en-US"/>
+          </a:p>
+        </p:txBody>
       </p:sp>
       <p:sp>
         <p:nvSpPr>
@@ -2505,7 +2258,7 @@
           <a:bodyPr wrap="square" lIns="0" tIns="0" rIns="0" bIns="0" rtlCol="0" anchor="ctr"/>
           <a:lstStyle/>
           <a:p>
-            <a:pPr indent="0" marL="0">
+            <a:pPr marL="0" indent="0">
               <a:buNone/>
             </a:pPr>
             <a:r>
@@ -2544,7 +2297,7 @@
           <a:bodyPr wrap="square" lIns="0" tIns="0" rIns="0" bIns="0" rtlCol="0" anchor="ctr"/>
           <a:lstStyle/>
           <a:p>
-            <a:pPr indent="0" marL="0">
+            <a:pPr marL="0" indent="0">
               <a:buNone/>
             </a:pPr>
             <a:r>
@@ -2583,7 +2336,7 @@
           <a:bodyPr wrap="square" lIns="0" tIns="0" rIns="0" bIns="0" rtlCol="0" anchor="ctr"/>
           <a:lstStyle/>
           <a:p>
-            <a:pPr indent="0" marL="0">
+            <a:pPr marL="0" indent="0">
               <a:buNone/>
             </a:pPr>
             <a:r>
@@ -2622,7 +2375,7 @@
           <a:bodyPr wrap="square" lIns="0" tIns="0" rIns="0" bIns="0" rtlCol="0" anchor="ctr"/>
           <a:lstStyle/>
           <a:p>
-            <a:pPr indent="0" marL="0">
+            <a:pPr marL="0" indent="0">
               <a:buNone/>
             </a:pPr>
             <a:r>
@@ -2661,7 +2414,7 @@
           <a:bodyPr wrap="square" lIns="0" tIns="0" rIns="0" bIns="0" rtlCol="0" anchor="ctr"/>
           <a:lstStyle/>
           <a:p>
-            <a:pPr indent="0" marL="0">
+            <a:pPr marL="0" indent="0">
               <a:buNone/>
             </a:pPr>
             <a:r>
@@ -2700,7 +2453,7 @@
           <a:bodyPr wrap="square" lIns="0" tIns="0" rIns="0" bIns="0" rtlCol="0" anchor="ctr"/>
           <a:lstStyle/>
           <a:p>
-            <a:pPr indent="0" marL="0">
+            <a:pPr marL="0" indent="0">
               <a:buNone/>
             </a:pPr>
             <a:r>
@@ -2739,7 +2492,7 @@
           <a:bodyPr wrap="square" lIns="0" tIns="0" rIns="0" bIns="0" rtlCol="0" anchor="ctr"/>
           <a:lstStyle/>
           <a:p>
-            <a:pPr algn="r" indent="0" marL="0">
+            <a:pPr marL="0" indent="0" algn="r">
               <a:buNone/>
             </a:pPr>
             <a:r>
@@ -2773,6 +2526,7 @@
         <a:solidFill>
           <a:srgbClr val="FFFFFF"/>
         </a:solidFill>
+        <a:effectLst/>
       </p:bgPr>
     </p:bg>
     <p:spTree>
@@ -2810,7 +2564,7 @@
           <a:bodyPr wrap="square" lIns="0" tIns="0" rIns="0" bIns="0" rtlCol="0" anchor="ctr"/>
           <a:lstStyle/>
           <a:p>
-            <a:pPr indent="0" marL="0">
+            <a:pPr marL="0" indent="0">
               <a:buNone/>
             </a:pPr>
             <a:r>
@@ -2849,7 +2603,7 @@
           <a:bodyPr wrap="square" lIns="0" tIns="0" rIns="0" bIns="0" rtlCol="0" anchor="ctr"/>
           <a:lstStyle/>
           <a:p>
-            <a:pPr indent="0" marL="0">
+            <a:pPr marL="0" indent="0">
               <a:buNone/>
             </a:pPr>
             <a:r>
@@ -2891,17 +2645,24 @@
             <a:prstDash val="solid"/>
           </a:ln>
         </p:spPr>
+        <p:txBody>
+          <a:bodyPr/>
+          <a:lstStyle/>
+          <a:p>
+            <a:endParaRPr lang="en-US"/>
+          </a:p>
+        </p:txBody>
       </p:sp>
       <p:pic>
         <p:nvPicPr>
-          <p:cNvPr id="5" name="Image 0" descr="preencoded.png">    </p:cNvPr>
+          <p:cNvPr id="5" name="Image 0" descr="preencoded.png"/>
           <p:cNvPicPr>
             <a:picLocks noChangeAspect="1"/>
           </p:cNvPicPr>
           <p:nvPr/>
         </p:nvPicPr>
         <p:blipFill>
-          <a:blip r:embed="rId1"/>
+          <a:blip r:embed="rId3"/>
           <a:stretch>
             <a:fillRect/>
           </a:stretch>
@@ -2937,7 +2698,7 @@
           <a:bodyPr wrap="square" lIns="0" tIns="0" rIns="0" bIns="0" rtlCol="0" anchor="ctr"/>
           <a:lstStyle/>
           <a:p>
-            <a:pPr indent="0" marL="0">
+            <a:pPr marL="0" indent="0">
               <a:buNone/>
             </a:pPr>
             <a:r>
@@ -2976,7 +2737,7 @@
           <a:bodyPr wrap="square" lIns="0" tIns="0" rIns="0" bIns="0" rtlCol="0" anchor="ctr"/>
           <a:lstStyle/>
           <a:p>
-            <a:pPr indent="0" marL="0">
+            <a:pPr marL="0" indent="0">
               <a:buNone/>
             </a:pPr>
             <a:r>
@@ -3018,17 +2779,24 @@
             <a:prstDash val="solid"/>
           </a:ln>
         </p:spPr>
+        <p:txBody>
+          <a:bodyPr/>
+          <a:lstStyle/>
+          <a:p>
+            <a:endParaRPr lang="en-US"/>
+          </a:p>
+        </p:txBody>
       </p:sp>
       <p:pic>
         <p:nvPicPr>
-          <p:cNvPr id="9" name="Image 1" descr="preencoded.png">    </p:cNvPr>
+          <p:cNvPr id="9" name="Image 1" descr="preencoded.png"/>
           <p:cNvPicPr>
             <a:picLocks noChangeAspect="1"/>
           </p:cNvPicPr>
           <p:nvPr/>
         </p:nvPicPr>
         <p:blipFill>
-          <a:blip r:embed="rId2"/>
+          <a:blip r:embed="rId3"/>
           <a:stretch>
             <a:fillRect/>
           </a:stretch>
@@ -3064,7 +2832,7 @@
           <a:bodyPr wrap="square" lIns="0" tIns="0" rIns="0" bIns="0" rtlCol="0" anchor="ctr"/>
           <a:lstStyle/>
           <a:p>
-            <a:pPr indent="0" marL="0">
+            <a:pPr marL="0" indent="0">
               <a:buNone/>
             </a:pPr>
             <a:r>
@@ -3103,7 +2871,7 @@
           <a:bodyPr wrap="square" lIns="0" tIns="0" rIns="0" bIns="0" rtlCol="0" anchor="ctr"/>
           <a:lstStyle/>
           <a:p>
-            <a:pPr indent="0" marL="0">
+            <a:pPr marL="0" indent="0">
               <a:buNone/>
             </a:pPr>
             <a:r>
@@ -3145,10 +2913,17 @@
             <a:prstDash val="solid"/>
           </a:ln>
         </p:spPr>
+        <p:txBody>
+          <a:bodyPr/>
+          <a:lstStyle/>
+          <a:p>
+            <a:endParaRPr lang="en-US"/>
+          </a:p>
+        </p:txBody>
       </p:sp>
       <p:pic>
         <p:nvPicPr>
-          <p:cNvPr id="13" name="Image 2" descr="preencoded.png">    </p:cNvPr>
+          <p:cNvPr id="13" name="Image 2" descr="preencoded.png"/>
           <p:cNvPicPr>
             <a:picLocks noChangeAspect="1"/>
           </p:cNvPicPr>
@@ -3191,7 +2966,7 @@
           <a:bodyPr wrap="square" lIns="0" tIns="0" rIns="0" bIns="0" rtlCol="0" anchor="ctr"/>
           <a:lstStyle/>
           <a:p>
-            <a:pPr indent="0" marL="0">
+            <a:pPr marL="0" indent="0">
               <a:buNone/>
             </a:pPr>
             <a:r>
@@ -3230,7 +3005,7 @@
           <a:bodyPr wrap="square" lIns="0" tIns="0" rIns="0" bIns="0" rtlCol="0" anchor="ctr"/>
           <a:lstStyle/>
           <a:p>
-            <a:pPr indent="0" marL="0">
+            <a:pPr marL="0" indent="0">
               <a:buNone/>
             </a:pPr>
             <a:r>
@@ -3272,17 +3047,24 @@
             <a:prstDash val="solid"/>
           </a:ln>
         </p:spPr>
+        <p:txBody>
+          <a:bodyPr/>
+          <a:lstStyle/>
+          <a:p>
+            <a:endParaRPr lang="en-US"/>
+          </a:p>
+        </p:txBody>
       </p:sp>
       <p:pic>
         <p:nvPicPr>
-          <p:cNvPr id="17" name="Image 3" descr="preencoded.png">    </p:cNvPr>
+          <p:cNvPr id="17" name="Image 3" descr="preencoded.png"/>
           <p:cNvPicPr>
             <a:picLocks noChangeAspect="1"/>
           </p:cNvPicPr>
           <p:nvPr/>
         </p:nvPicPr>
         <p:blipFill>
-          <a:blip r:embed="rId4"/>
+          <a:blip r:embed="rId3"/>
           <a:stretch>
             <a:fillRect/>
           </a:stretch>
@@ -3318,7 +3100,7 @@
           <a:bodyPr wrap="square" lIns="0" tIns="0" rIns="0" bIns="0" rtlCol="0" anchor="ctr"/>
           <a:lstStyle/>
           <a:p>
-            <a:pPr indent="0" marL="0">
+            <a:pPr marL="0" indent="0">
               <a:buNone/>
             </a:pPr>
             <a:r>
@@ -3357,7 +3139,7 @@
           <a:bodyPr wrap="square" lIns="0" tIns="0" rIns="0" bIns="0" rtlCol="0" anchor="ctr"/>
           <a:lstStyle/>
           <a:p>
-            <a:pPr indent="0" marL="0">
+            <a:pPr marL="0" indent="0">
               <a:buNone/>
             </a:pPr>
             <a:r>
@@ -3399,17 +3181,24 @@
             <a:prstDash val="solid"/>
           </a:ln>
         </p:spPr>
+        <p:txBody>
+          <a:bodyPr/>
+          <a:lstStyle/>
+          <a:p>
+            <a:endParaRPr lang="en-US"/>
+          </a:p>
+        </p:txBody>
       </p:sp>
       <p:pic>
         <p:nvPicPr>
-          <p:cNvPr id="21" name="Image 4" descr="preencoded.png">    </p:cNvPr>
+          <p:cNvPr id="21" name="Image 4" descr="preencoded.png"/>
           <p:cNvPicPr>
             <a:picLocks noChangeAspect="1"/>
           </p:cNvPicPr>
           <p:nvPr/>
         </p:nvPicPr>
         <p:blipFill>
-          <a:blip r:embed="rId5"/>
+          <a:blip r:embed="rId3"/>
           <a:stretch>
             <a:fillRect/>
           </a:stretch>
@@ -3445,7 +3234,7 @@
           <a:bodyPr wrap="square" lIns="0" tIns="0" rIns="0" bIns="0" rtlCol="0" anchor="ctr"/>
           <a:lstStyle/>
           <a:p>
-            <a:pPr indent="0" marL="0">
+            <a:pPr marL="0" indent="0">
               <a:buNone/>
             </a:pPr>
             <a:r>
@@ -3484,7 +3273,7 @@
           <a:bodyPr wrap="square" lIns="0" tIns="0" rIns="0" bIns="0" rtlCol="0" anchor="ctr"/>
           <a:lstStyle/>
           <a:p>
-            <a:pPr indent="0" marL="0">
+            <a:pPr marL="0" indent="0">
               <a:buNone/>
             </a:pPr>
             <a:r>
@@ -3526,17 +3315,24 @@
             <a:prstDash val="solid"/>
           </a:ln>
         </p:spPr>
+        <p:txBody>
+          <a:bodyPr/>
+          <a:lstStyle/>
+          <a:p>
+            <a:endParaRPr lang="en-US"/>
+          </a:p>
+        </p:txBody>
       </p:sp>
       <p:pic>
         <p:nvPicPr>
-          <p:cNvPr id="25" name="Image 5" descr="preencoded.png">    </p:cNvPr>
+          <p:cNvPr id="25" name="Image 5" descr="preencoded.png"/>
           <p:cNvPicPr>
             <a:picLocks noChangeAspect="1"/>
           </p:cNvPicPr>
           <p:nvPr/>
         </p:nvPicPr>
         <p:blipFill>
-          <a:blip r:embed="rId6"/>
+          <a:blip r:embed="rId3"/>
           <a:stretch>
             <a:fillRect/>
           </a:stretch>
@@ -3572,7 +3368,7 @@
           <a:bodyPr wrap="square" lIns="0" tIns="0" rIns="0" bIns="0" rtlCol="0" anchor="ctr"/>
           <a:lstStyle/>
           <a:p>
-            <a:pPr indent="0" marL="0">
+            <a:pPr marL="0" indent="0">
               <a:buNone/>
             </a:pPr>
             <a:r>
@@ -3611,7 +3407,7 @@
           <a:bodyPr wrap="square" lIns="0" tIns="0" rIns="0" bIns="0" rtlCol="0" anchor="ctr"/>
           <a:lstStyle/>
           <a:p>
-            <a:pPr indent="0" marL="0">
+            <a:pPr marL="0" indent="0">
               <a:buNone/>
             </a:pPr>
             <a:r>
@@ -3650,7 +3446,7 @@
           <a:bodyPr wrap="square" lIns="0" tIns="0" rIns="0" bIns="0" rtlCol="0" anchor="ctr"/>
           <a:lstStyle/>
           <a:p>
-            <a:pPr indent="0" marL="0">
+            <a:pPr marL="0" indent="0">
               <a:buNone/>
             </a:pPr>
             <a:r>
@@ -3689,7 +3485,7 @@
           <a:bodyPr wrap="square" lIns="0" tIns="0" rIns="0" bIns="0" rtlCol="0" anchor="ctr"/>
           <a:lstStyle/>
           <a:p>
-            <a:pPr algn="r" indent="0" marL="0">
+            <a:pPr marL="0" indent="0" algn="r">
               <a:buNone/>
             </a:pPr>
             <a:r>
@@ -3723,6 +3519,7 @@
         <a:solidFill>
           <a:srgbClr val="FFFFFF"/>
         </a:solidFill>
+        <a:effectLst/>
       </p:bgPr>
     </p:bg>
     <p:spTree>
@@ -3760,7 +3557,7 @@
           <a:bodyPr wrap="square" lIns="0" tIns="0" rIns="0" bIns="0" rtlCol="0" anchor="ctr"/>
           <a:lstStyle/>
           <a:p>
-            <a:pPr indent="0" marL="0">
+            <a:pPr marL="0" indent="0">
               <a:buNone/>
             </a:pPr>
             <a:r>
@@ -3780,14 +3577,14 @@
       </p:sp>
       <p:pic>
         <p:nvPicPr>
-          <p:cNvPr id="3" name="Image 0" descr="preencoded.png">    </p:cNvPr>
+          <p:cNvPr id="3" name="Image 0" descr="preencoded.png"/>
           <p:cNvPicPr>
             <a:picLocks noChangeAspect="1"/>
           </p:cNvPicPr>
           <p:nvPr/>
         </p:nvPicPr>
         <p:blipFill>
-          <a:blip r:embed="rId1"/>
+          <a:blip r:embed="rId3"/>
           <a:stretch>
             <a:fillRect/>
           </a:stretch>
@@ -3823,7 +3620,7 @@
           <a:bodyPr wrap="square" lIns="0" tIns="0" rIns="0" bIns="0" rtlCol="0" anchor="ctr"/>
           <a:lstStyle/>
           <a:p>
-            <a:pPr indent="0" marL="0">
+            <a:pPr marL="0" indent="0">
               <a:buNone/>
             </a:pPr>
             <a:r>
@@ -3949,14 +3746,14 @@
       </p:sp>
       <p:pic>
         <p:nvPicPr>
-          <p:cNvPr id="6" name="Image 1" descr="preencoded.png">    </p:cNvPr>
+          <p:cNvPr id="6" name="Image 1" descr="preencoded.png"/>
           <p:cNvPicPr>
             <a:picLocks noChangeAspect="1"/>
           </p:cNvPicPr>
           <p:nvPr/>
         </p:nvPicPr>
         <p:blipFill>
-          <a:blip r:embed="rId2"/>
+          <a:blip r:embed="rId4"/>
           <a:stretch>
             <a:fillRect/>
           </a:stretch>
@@ -3992,7 +3789,7 @@
           <a:bodyPr wrap="square" lIns="0" tIns="0" rIns="0" bIns="0" rtlCol="0" anchor="ctr"/>
           <a:lstStyle/>
           <a:p>
-            <a:pPr indent="0" marL="0">
+            <a:pPr marL="0" indent="0">
               <a:buNone/>
             </a:pPr>
             <a:r>
@@ -4137,7 +3934,7 @@
           <a:bodyPr wrap="square" lIns="0" tIns="0" rIns="0" bIns="0" rtlCol="0" anchor="ctr"/>
           <a:lstStyle/>
           <a:p>
-            <a:pPr indent="0" marL="0">
+            <a:pPr marL="0" indent="0">
               <a:buNone/>
             </a:pPr>
             <a:r>
@@ -4176,7 +3973,7 @@
           <a:bodyPr wrap="square" lIns="0" tIns="0" rIns="0" bIns="0" rtlCol="0" anchor="ctr"/>
           <a:lstStyle/>
           <a:p>
-            <a:pPr algn="r" indent="0" marL="0">
+            <a:pPr marL="0" indent="0" algn="r">
               <a:buNone/>
             </a:pPr>
             <a:r>
@@ -4210,6 +4007,7 @@
         <a:solidFill>
           <a:srgbClr val="1E2761"/>
         </a:solidFill>
+        <a:effectLst/>
       </p:bgPr>
     </p:bg>
     <p:spTree>
@@ -4245,6 +4043,13 @@
           </a:solidFill>
           <a:ln/>
         </p:spPr>
+        <p:txBody>
+          <a:bodyPr/>
+          <a:lstStyle/>
+          <a:p>
+            <a:endParaRPr lang="en-US"/>
+          </a:p>
+        </p:txBody>
       </p:sp>
       <p:sp>
         <p:nvSpPr>
@@ -4267,11 +4072,11 @@
           <a:bodyPr wrap="square" lIns="0" tIns="0" rIns="0" bIns="0" rtlCol="0" anchor="ctr"/>
           <a:lstStyle/>
           <a:p>
-            <a:pPr indent="0" marL="0">
-              <a:buNone/>
-            </a:pPr>
-            <a:r>
-              <a:rPr lang="en-US" sz="1200" b="1" spc="600" kern="0" dirty="0">
+            <a:pPr marL="0" indent="0">
+              <a:buNone/>
+            </a:pPr>
+            <a:r>
+              <a:rPr lang="en-US" sz="1200" b="1" kern="0" spc="600" dirty="0">
                 <a:solidFill>
                   <a:srgbClr val="CADCFC"/>
                 </a:solidFill>
@@ -4306,7 +4111,7 @@
           <a:bodyPr wrap="square" lIns="0" tIns="0" rIns="0" bIns="0" rtlCol="0" anchor="ctr"/>
           <a:lstStyle/>
           <a:p>
-            <a:pPr indent="0" marL="0">
+            <a:pPr marL="0" indent="0">
               <a:buNone/>
             </a:pPr>
             <a:r>
@@ -4345,7 +4150,7 @@
           <a:bodyPr wrap="square" lIns="0" tIns="0" rIns="0" bIns="0" rtlCol="0" anchor="ctr"/>
           <a:lstStyle/>
           <a:p>
-            <a:pPr indent="0" marL="0">
+            <a:pPr marL="0" indent="0">
               <a:buNone/>
             </a:pPr>
             <a:r>
@@ -4382,6 +4187,13 @@
           </a:solidFill>
           <a:ln/>
         </p:spPr>
+        <p:txBody>
+          <a:bodyPr/>
+          <a:lstStyle/>
+          <a:p>
+            <a:endParaRPr lang="en-US"/>
+          </a:p>
+        </p:txBody>
       </p:sp>
       <p:sp>
         <p:nvSpPr>
@@ -4404,7 +4216,7 @@
           <a:bodyPr wrap="square" lIns="0" tIns="0" rIns="0" bIns="0" rtlCol="0" anchor="ctr"/>
           <a:lstStyle/>
           <a:p>
-            <a:pPr algn="ctr" indent="0" marL="0">
+            <a:pPr marL="0" indent="0" algn="ctr">
               <a:buNone/>
             </a:pPr>
             <a:r>
@@ -4443,7 +4255,7 @@
           <a:bodyPr wrap="square" lIns="0" tIns="0" rIns="0" bIns="0" rtlCol="0" anchor="ctr"/>
           <a:lstStyle/>
           <a:p>
-            <a:pPr indent="0" marL="0">
+            <a:pPr marL="0" indent="0">
               <a:buNone/>
             </a:pPr>
             <a:r>
@@ -4480,6 +4292,13 @@
           </a:solidFill>
           <a:ln/>
         </p:spPr>
+        <p:txBody>
+          <a:bodyPr/>
+          <a:lstStyle/>
+          <a:p>
+            <a:endParaRPr lang="en-US"/>
+          </a:p>
+        </p:txBody>
       </p:sp>
       <p:sp>
         <p:nvSpPr>
@@ -4502,7 +4321,7 @@
           <a:bodyPr wrap="square" lIns="0" tIns="0" rIns="0" bIns="0" rtlCol="0" anchor="ctr"/>
           <a:lstStyle/>
           <a:p>
-            <a:pPr algn="ctr" indent="0" marL="0">
+            <a:pPr marL="0" indent="0" algn="ctr">
               <a:buNone/>
             </a:pPr>
             <a:r>
@@ -4541,7 +4360,7 @@
           <a:bodyPr wrap="square" lIns="0" tIns="0" rIns="0" bIns="0" rtlCol="0" anchor="ctr"/>
           <a:lstStyle/>
           <a:p>
-            <a:pPr indent="0" marL="0">
+            <a:pPr marL="0" indent="0">
               <a:buNone/>
             </a:pPr>
             <a:r>
@@ -4578,6 +4397,13 @@
           </a:solidFill>
           <a:ln/>
         </p:spPr>
+        <p:txBody>
+          <a:bodyPr/>
+          <a:lstStyle/>
+          <a:p>
+            <a:endParaRPr lang="en-US"/>
+          </a:p>
+        </p:txBody>
       </p:sp>
       <p:sp>
         <p:nvSpPr>
@@ -4600,7 +4426,7 @@
           <a:bodyPr wrap="square" lIns="0" tIns="0" rIns="0" bIns="0" rtlCol="0" anchor="ctr"/>
           <a:lstStyle/>
           <a:p>
-            <a:pPr algn="ctr" indent="0" marL="0">
+            <a:pPr marL="0" indent="0" algn="ctr">
               <a:buNone/>
             </a:pPr>
             <a:r>
@@ -4639,7 +4465,7 @@
           <a:bodyPr wrap="square" lIns="0" tIns="0" rIns="0" bIns="0" rtlCol="0" anchor="ctr"/>
           <a:lstStyle/>
           <a:p>
-            <a:pPr indent="0" marL="0">
+            <a:pPr marL="0" indent="0">
               <a:buNone/>
             </a:pPr>
             <a:r>
@@ -4676,6 +4502,13 @@
           </a:solidFill>
           <a:ln/>
         </p:spPr>
+        <p:txBody>
+          <a:bodyPr/>
+          <a:lstStyle/>
+          <a:p>
+            <a:endParaRPr lang="en-US"/>
+          </a:p>
+        </p:txBody>
       </p:sp>
       <p:sp>
         <p:nvSpPr>
@@ -4698,7 +4531,7 @@
           <a:bodyPr wrap="square" lIns="0" tIns="0" rIns="0" bIns="0" rtlCol="0" anchor="ctr"/>
           <a:lstStyle/>
           <a:p>
-            <a:pPr algn="ctr" indent="0" marL="0">
+            <a:pPr marL="0" indent="0" algn="ctr">
               <a:buNone/>
             </a:pPr>
             <a:r>
@@ -4737,7 +4570,7 @@
           <a:bodyPr wrap="square" lIns="0" tIns="0" rIns="0" bIns="0" rtlCol="0" anchor="ctr"/>
           <a:lstStyle/>
           <a:p>
-            <a:pPr indent="0" marL="0">
+            <a:pPr marL="0" indent="0">
               <a:buNone/>
             </a:pPr>
             <a:r>
@@ -4776,7 +4609,7 @@
           <a:bodyPr wrap="square" lIns="0" tIns="0" rIns="0" bIns="0" rtlCol="0" anchor="ctr"/>
           <a:lstStyle/>
           <a:p>
-            <a:pPr indent="0" marL="0">
+            <a:pPr marL="0" indent="0">
               <a:buNone/>
             </a:pPr>
             <a:r>
@@ -4815,7 +4648,7 @@
           <a:bodyPr wrap="square" lIns="0" tIns="0" rIns="0" bIns="0" rtlCol="0" anchor="ctr"/>
           <a:lstStyle/>
           <a:p>
-            <a:pPr algn="r" indent="0" marL="0">
+            <a:pPr marL="0" indent="0" algn="r">
               <a:buNone/>
             </a:pPr>
             <a:r>
@@ -4849,6 +4682,7 @@
         <a:solidFill>
           <a:srgbClr val="1E2761"/>
         </a:solidFill>
+        <a:effectLst/>
       </p:bgPr>
     </p:bg>
     <p:spTree>
@@ -4884,6 +4718,13 @@
           </a:solidFill>
           <a:ln/>
         </p:spPr>
+        <p:txBody>
+          <a:bodyPr/>
+          <a:lstStyle/>
+          <a:p>
+            <a:endParaRPr lang="en-US"/>
+          </a:p>
+        </p:txBody>
       </p:sp>
       <p:sp>
         <p:nvSpPr>
@@ -4906,11 +4747,11 @@
           <a:bodyPr wrap="square" lIns="0" tIns="0" rIns="0" bIns="0" rtlCol="0" anchor="ctr"/>
           <a:lstStyle/>
           <a:p>
-            <a:pPr indent="0" marL="0">
-              <a:buNone/>
-            </a:pPr>
-            <a:r>
-              <a:rPr lang="en-US" sz="1200" b="1" spc="600" kern="0" dirty="0">
+            <a:pPr marL="0" indent="0">
+              <a:buNone/>
+            </a:pPr>
+            <a:r>
+              <a:rPr lang="en-US" sz="1200" b="1" kern="0" spc="600" dirty="0">
                 <a:solidFill>
                   <a:srgbClr val="CADCFC"/>
                 </a:solidFill>
@@ -4945,7 +4786,7 @@
           <a:bodyPr wrap="square" lIns="0" tIns="0" rIns="0" bIns="0" rtlCol="0" anchor="ctr"/>
           <a:lstStyle/>
           <a:p>
-            <a:pPr indent="0" marL="0">
+            <a:pPr marL="0" indent="0">
               <a:buNone/>
             </a:pPr>
             <a:r>
@@ -4984,7 +4825,7 @@
           <a:bodyPr wrap="square" lIns="0" tIns="0" rIns="0" bIns="0" rtlCol="0" anchor="ctr"/>
           <a:lstStyle/>
           <a:p>
-            <a:pPr indent="0" marL="0">
+            <a:pPr marL="0" indent="0">
               <a:buNone/>
             </a:pPr>
             <a:r>
@@ -5004,14 +4845,14 @@
       </p:sp>
       <p:pic>
         <p:nvPicPr>
-          <p:cNvPr id="6" name="Image 0" descr="preencoded.png">    </p:cNvPr>
+          <p:cNvPr id="6" name="Image 0" descr="preencoded.png"/>
           <p:cNvPicPr>
             <a:picLocks noChangeAspect="1"/>
           </p:cNvPicPr>
           <p:nvPr/>
         </p:nvPicPr>
         <p:blipFill>
-          <a:blip r:embed="rId1"/>
+          <a:blip r:embed="rId3"/>
           <a:stretch>
             <a:fillRect/>
           </a:stretch>
@@ -5047,7 +4888,7 @@
           <a:bodyPr wrap="square" lIns="0" tIns="0" rIns="0" bIns="0" rtlCol="0" anchor="ctr"/>
           <a:lstStyle/>
           <a:p>
-            <a:pPr indent="0" marL="0">
+            <a:pPr marL="0" indent="0">
               <a:buNone/>
             </a:pPr>
             <a:r>
@@ -5059,7 +4900,7 @@
                 <a:ea typeface="Calibri" pitchFamily="34" charset="-122"/>
                 <a:cs typeface="Calibri" pitchFamily="34" charset="-120"/>
               </a:rPr>
-              <a:t>Kinjal T  —  Python Class Project</a:t>
+              <a:t>Python Class Project</a:t>
             </a:r>
             <a:endParaRPr lang="en-US" sz="1400" dirty="0"/>
           </a:p>
@@ -5081,6 +4922,7 @@
         <a:solidFill>
           <a:srgbClr val="FFFFFF"/>
         </a:solidFill>
+        <a:effectLst/>
       </p:bgPr>
     </p:bg>
     <p:spTree>
@@ -5118,7 +4960,7 @@
           <a:bodyPr wrap="square" lIns="0" tIns="0" rIns="0" bIns="0" rtlCol="0" anchor="ctr"/>
           <a:lstStyle/>
           <a:p>
-            <a:pPr indent="0" marL="0">
+            <a:pPr marL="0" indent="0">
               <a:buNone/>
             </a:pPr>
             <a:r>
@@ -5155,6 +4997,13 @@
           </a:solidFill>
           <a:ln/>
         </p:spPr>
+        <p:txBody>
+          <a:bodyPr/>
+          <a:lstStyle/>
+          <a:p>
+            <a:endParaRPr lang="en-US"/>
+          </a:p>
+        </p:txBody>
       </p:sp>
       <p:sp>
         <p:nvSpPr>
@@ -5177,7 +5026,7 @@
           <a:bodyPr wrap="square" lIns="0" tIns="0" rIns="0" bIns="0" rtlCol="0" anchor="ctr"/>
           <a:lstStyle/>
           <a:p>
-            <a:pPr algn="ctr" indent="0" marL="0">
+            <a:pPr marL="0" indent="0" algn="ctr">
               <a:buNone/>
             </a:pPr>
             <a:r>
@@ -5216,7 +5065,7 @@
           <a:bodyPr wrap="square" lIns="0" tIns="0" rIns="0" bIns="0" rtlCol="0" anchor="ctr"/>
           <a:lstStyle/>
           <a:p>
-            <a:pPr algn="ctr" indent="0" marL="0">
+            <a:pPr marL="0" indent="0" algn="ctr">
               <a:buNone/>
             </a:pPr>
             <a:r>
@@ -5255,7 +5104,7 @@
           <a:bodyPr wrap="square" lIns="0" tIns="0" rIns="0" bIns="0" rtlCol="0" anchor="ctr"/>
           <a:lstStyle/>
           <a:p>
-            <a:pPr algn="ctr" indent="0" marL="0">
+            <a:pPr marL="0" indent="0" algn="ctr">
               <a:buNone/>
             </a:pPr>
             <a:r>
@@ -5294,7 +5143,7 @@
           <a:bodyPr wrap="square" lIns="0" tIns="0" rIns="0" bIns="0" rtlCol="0" anchor="ctr"/>
           <a:lstStyle/>
           <a:p>
-            <a:pPr indent="0" marL="0">
+            <a:pPr marL="0" indent="0">
               <a:buNone/>
             </a:pPr>
             <a:r>
@@ -5314,133 +5163,7 @@
       </p:sp>
       <p:pic>
         <p:nvPicPr>
-          <p:cNvPr id="8" name="Image 0" descr="preencoded.png">    </p:cNvPr>
-          <p:cNvPicPr>
-            <a:picLocks noChangeAspect="1"/>
-          </p:cNvPicPr>
-          <p:nvPr/>
-        </p:nvPicPr>
-        <p:blipFill>
-          <a:blip r:embed="rId1"/>
-          <a:stretch>
-            <a:fillRect/>
-          </a:stretch>
-        </p:blipFill>
-        <p:spPr>
-          <a:xfrm>
-            <a:off x="4663440" y="1783080"/>
-            <a:ext cx="274320" cy="274320"/>
-          </a:xfrm>
-          <a:prstGeom prst="rect">
-            <a:avLst/>
-          </a:prstGeom>
-        </p:spPr>
-      </p:pic>
-      <p:sp>
-        <p:nvSpPr>
-          <p:cNvPr id="9" name="Text 6"/>
-          <p:cNvSpPr/>
-          <p:nvPr/>
-        </p:nvSpPr>
-        <p:spPr>
-          <a:xfrm>
-            <a:off x="5029200" y="1764792"/>
-            <a:ext cx="3749040" cy="320040"/>
-          </a:xfrm>
-          <a:prstGeom prst="rect">
-            <a:avLst/>
-          </a:prstGeom>
-          <a:noFill/>
-          <a:ln/>
-        </p:spPr>
-        <p:txBody>
-          <a:bodyPr wrap="square" lIns="0" tIns="0" rIns="0" bIns="0" rtlCol="0" anchor="ctr"/>
-          <a:lstStyle/>
-          <a:p>
-            <a:pPr indent="0" marL="0">
-              <a:buNone/>
-            </a:pPr>
-            <a:r>
-              <a:rPr lang="en-US" sz="1300" dirty="0">
-                <a:solidFill>
-                  <a:srgbClr val="2B2D42"/>
-                </a:solidFill>
-                <a:latin typeface="Calibri" pitchFamily="34" charset="0"/>
-                <a:ea typeface="Calibri" pitchFamily="34" charset="-122"/>
-                <a:cs typeface="Calibri" pitchFamily="34" charset="-120"/>
-              </a:rPr>
-              <a:t>Data is scattered across dozens of sites</a:t>
-            </a:r>
-            <a:endParaRPr lang="en-US" sz="1300" dirty="0"/>
-          </a:p>
-        </p:txBody>
-      </p:sp>
-      <p:pic>
-        <p:nvPicPr>
-          <p:cNvPr id="10" name="Image 1" descr="preencoded.png">    </p:cNvPr>
-          <p:cNvPicPr>
-            <a:picLocks noChangeAspect="1"/>
-          </p:cNvPicPr>
-          <p:nvPr/>
-        </p:nvPicPr>
-        <p:blipFill>
-          <a:blip r:embed="rId2"/>
-          <a:stretch>
-            <a:fillRect/>
-          </a:stretch>
-        </p:blipFill>
-        <p:spPr>
-          <a:xfrm>
-            <a:off x="4663440" y="2286000"/>
-            <a:ext cx="274320" cy="274320"/>
-          </a:xfrm>
-          <a:prstGeom prst="rect">
-            <a:avLst/>
-          </a:prstGeom>
-        </p:spPr>
-      </p:pic>
-      <p:sp>
-        <p:nvSpPr>
-          <p:cNvPr id="11" name="Text 7"/>
-          <p:cNvSpPr/>
-          <p:nvPr/>
-        </p:nvSpPr>
-        <p:spPr>
-          <a:xfrm>
-            <a:off x="5029200" y="2267712"/>
-            <a:ext cx="3749040" cy="320040"/>
-          </a:xfrm>
-          <a:prstGeom prst="rect">
-            <a:avLst/>
-          </a:prstGeom>
-          <a:noFill/>
-          <a:ln/>
-        </p:spPr>
-        <p:txBody>
-          <a:bodyPr wrap="square" lIns="0" tIns="0" rIns="0" bIns="0" rtlCol="0" anchor="ctr"/>
-          <a:lstStyle/>
-          <a:p>
-            <a:pPr indent="0" marL="0">
-              <a:buNone/>
-            </a:pPr>
-            <a:r>
-              <a:rPr lang="en-US" sz="1300" dirty="0">
-                <a:solidFill>
-                  <a:srgbClr val="2B2D42"/>
-                </a:solidFill>
-                <a:latin typeface="Calibri" pitchFamily="34" charset="0"/>
-                <a:ea typeface="Calibri" pitchFamily="34" charset="-122"/>
-                <a:cs typeface="Calibri" pitchFamily="34" charset="-120"/>
-              </a:rPr>
-              <a:t>Indicators (MA, RSI, volatility) sound technical</a:t>
-            </a:r>
-            <a:endParaRPr lang="en-US" sz="1300" dirty="0"/>
-          </a:p>
-        </p:txBody>
-      </p:sp>
-      <p:pic>
-        <p:nvPicPr>
-          <p:cNvPr id="12" name="Image 2" descr="preencoded.png">    </p:cNvPr>
+          <p:cNvPr id="8" name="Image 0" descr="preencoded.png"/>
           <p:cNvPicPr>
             <a:picLocks noChangeAspect="1"/>
           </p:cNvPicPr>
@@ -5454,6 +5177,132 @@
         </p:blipFill>
         <p:spPr>
           <a:xfrm>
+            <a:off x="4663440" y="1783080"/>
+            <a:ext cx="274320" cy="274320"/>
+          </a:xfrm>
+          <a:prstGeom prst="rect">
+            <a:avLst/>
+          </a:prstGeom>
+        </p:spPr>
+      </p:pic>
+      <p:sp>
+        <p:nvSpPr>
+          <p:cNvPr id="9" name="Text 6"/>
+          <p:cNvSpPr/>
+          <p:nvPr/>
+        </p:nvSpPr>
+        <p:spPr>
+          <a:xfrm>
+            <a:off x="5029200" y="1764792"/>
+            <a:ext cx="3749040" cy="320040"/>
+          </a:xfrm>
+          <a:prstGeom prst="rect">
+            <a:avLst/>
+          </a:prstGeom>
+          <a:noFill/>
+          <a:ln/>
+        </p:spPr>
+        <p:txBody>
+          <a:bodyPr wrap="square" lIns="0" tIns="0" rIns="0" bIns="0" rtlCol="0" anchor="ctr"/>
+          <a:lstStyle/>
+          <a:p>
+            <a:pPr marL="0" indent="0">
+              <a:buNone/>
+            </a:pPr>
+            <a:r>
+              <a:rPr lang="en-US" sz="1300" dirty="0">
+                <a:solidFill>
+                  <a:srgbClr val="2B2D42"/>
+                </a:solidFill>
+                <a:latin typeface="Calibri" pitchFamily="34" charset="0"/>
+                <a:ea typeface="Calibri" pitchFamily="34" charset="-122"/>
+                <a:cs typeface="Calibri" pitchFamily="34" charset="-120"/>
+              </a:rPr>
+              <a:t>Data is scattered across dozens of sites</a:t>
+            </a:r>
+            <a:endParaRPr lang="en-US" sz="1300" dirty="0"/>
+          </a:p>
+        </p:txBody>
+      </p:sp>
+      <p:pic>
+        <p:nvPicPr>
+          <p:cNvPr id="10" name="Image 1" descr="preencoded.png"/>
+          <p:cNvPicPr>
+            <a:picLocks noChangeAspect="1"/>
+          </p:cNvPicPr>
+          <p:nvPr/>
+        </p:nvPicPr>
+        <p:blipFill>
+          <a:blip r:embed="rId3"/>
+          <a:stretch>
+            <a:fillRect/>
+          </a:stretch>
+        </p:blipFill>
+        <p:spPr>
+          <a:xfrm>
+            <a:off x="4663440" y="2286000"/>
+            <a:ext cx="274320" cy="274320"/>
+          </a:xfrm>
+          <a:prstGeom prst="rect">
+            <a:avLst/>
+          </a:prstGeom>
+        </p:spPr>
+      </p:pic>
+      <p:sp>
+        <p:nvSpPr>
+          <p:cNvPr id="11" name="Text 7"/>
+          <p:cNvSpPr/>
+          <p:nvPr/>
+        </p:nvSpPr>
+        <p:spPr>
+          <a:xfrm>
+            <a:off x="5029200" y="2267712"/>
+            <a:ext cx="3749040" cy="320040"/>
+          </a:xfrm>
+          <a:prstGeom prst="rect">
+            <a:avLst/>
+          </a:prstGeom>
+          <a:noFill/>
+          <a:ln/>
+        </p:spPr>
+        <p:txBody>
+          <a:bodyPr wrap="square" lIns="0" tIns="0" rIns="0" bIns="0" rtlCol="0" anchor="ctr"/>
+          <a:lstStyle/>
+          <a:p>
+            <a:pPr marL="0" indent="0">
+              <a:buNone/>
+            </a:pPr>
+            <a:r>
+              <a:rPr lang="en-US" sz="1300" dirty="0">
+                <a:solidFill>
+                  <a:srgbClr val="2B2D42"/>
+                </a:solidFill>
+                <a:latin typeface="Calibri" pitchFamily="34" charset="0"/>
+                <a:ea typeface="Calibri" pitchFamily="34" charset="-122"/>
+                <a:cs typeface="Calibri" pitchFamily="34" charset="-120"/>
+              </a:rPr>
+              <a:t>Indicators (MA, RSI, volatility) sound technical</a:t>
+            </a:r>
+            <a:endParaRPr lang="en-US" sz="1300" dirty="0"/>
+          </a:p>
+        </p:txBody>
+      </p:sp>
+      <p:pic>
+        <p:nvPicPr>
+          <p:cNvPr id="12" name="Image 2" descr="preencoded.png"/>
+          <p:cNvPicPr>
+            <a:picLocks noChangeAspect="1"/>
+          </p:cNvPicPr>
+          <p:nvPr/>
+        </p:nvPicPr>
+        <p:blipFill>
+          <a:blip r:embed="rId3"/>
+          <a:stretch>
+            <a:fillRect/>
+          </a:stretch>
+        </p:blipFill>
+        <p:spPr>
+          <a:xfrm>
             <a:off x="4663440" y="2788920"/>
             <a:ext cx="274320" cy="274320"/>
           </a:xfrm>
@@ -5483,7 +5332,7 @@
           <a:bodyPr wrap="square" lIns="0" tIns="0" rIns="0" bIns="0" rtlCol="0" anchor="ctr"/>
           <a:lstStyle/>
           <a:p>
-            <a:pPr indent="0" marL="0">
+            <a:pPr marL="0" indent="0">
               <a:buNone/>
             </a:pPr>
             <a:r>
@@ -5522,7 +5371,7 @@
           <a:bodyPr wrap="square" lIns="0" tIns="0" rIns="0" bIns="0" rtlCol="0" anchor="ctr"/>
           <a:lstStyle/>
           <a:p>
-            <a:pPr indent="0" marL="0">
+            <a:pPr marL="0" indent="0">
               <a:buNone/>
             </a:pPr>
             <a:r>
@@ -5536,9 +5385,6 @@
               </a:rPr>
               <a:t>The gap: </a:t>
             </a:r>
-            <a:pPr indent="0" marL="0">
-              <a:buNone/>
-            </a:pPr>
             <a:r>
               <a:rPr lang="en-US" sz="1300" i="1" dirty="0">
                 <a:solidFill>
@@ -5575,7 +5421,7 @@
           <a:bodyPr wrap="square" lIns="0" tIns="0" rIns="0" bIns="0" rtlCol="0" anchor="ctr"/>
           <a:lstStyle/>
           <a:p>
-            <a:pPr indent="0" marL="0">
+            <a:pPr marL="0" indent="0">
               <a:buNone/>
             </a:pPr>
             <a:r>
@@ -5614,7 +5460,7 @@
           <a:bodyPr wrap="square" lIns="0" tIns="0" rIns="0" bIns="0" rtlCol="0" anchor="ctr"/>
           <a:lstStyle/>
           <a:p>
-            <a:pPr algn="r" indent="0" marL="0">
+            <a:pPr marL="0" indent="0" algn="r">
               <a:buNone/>
             </a:pPr>
             <a:r>
@@ -5648,6 +5494,7 @@
         <a:solidFill>
           <a:srgbClr val="FFFFFF"/>
         </a:solidFill>
+        <a:effectLst/>
       </p:bgPr>
     </p:bg>
     <p:spTree>
@@ -5685,7 +5532,7 @@
           <a:bodyPr wrap="square" lIns="0" tIns="0" rIns="0" bIns="0" rtlCol="0" anchor="ctr"/>
           <a:lstStyle/>
           <a:p>
-            <a:pPr indent="0" marL="0">
+            <a:pPr marL="0" indent="0">
               <a:buNone/>
             </a:pPr>
             <a:r>
@@ -5722,6 +5569,13 @@
           </a:solidFill>
           <a:ln/>
         </p:spPr>
+        <p:txBody>
+          <a:bodyPr/>
+          <a:lstStyle/>
+          <a:p>
+            <a:endParaRPr lang="en-US"/>
+          </a:p>
+        </p:txBody>
       </p:sp>
       <p:sp>
         <p:nvSpPr>
@@ -5742,6 +5596,13 @@
           </a:solidFill>
           <a:ln/>
         </p:spPr>
+        <p:txBody>
+          <a:bodyPr/>
+          <a:lstStyle/>
+          <a:p>
+            <a:endParaRPr lang="en-US"/>
+          </a:p>
+        </p:txBody>
       </p:sp>
       <p:sp>
         <p:nvSpPr>
@@ -5764,7 +5625,7 @@
           <a:bodyPr wrap="square" lIns="0" tIns="0" rIns="0" bIns="0" rtlCol="0" anchor="ctr"/>
           <a:lstStyle/>
           <a:p>
-            <a:pPr indent="0" marL="0">
+            <a:pPr marL="0" indent="0">
               <a:buNone/>
             </a:pPr>
             <a:r>
@@ -5806,24 +5667,31 @@
             <a:prstDash val="solid"/>
           </a:ln>
           <a:effectLst>
-            <a:outerShdw sx="100000" sy="100000" kx="0" ky="0" algn="bl" rotWithShape="0" blurRad="76200" dist="25400" dir="8100000">
+            <a:outerShdw blurRad="76200" dist="25400" dir="8100000" algn="bl" rotWithShape="0">
               <a:srgbClr val="000000">
                 <a:alpha val="8000"/>
               </a:srgbClr>
             </a:outerShdw>
           </a:effectLst>
         </p:spPr>
+        <p:txBody>
+          <a:bodyPr/>
+          <a:lstStyle/>
+          <a:p>
+            <a:endParaRPr lang="en-US"/>
+          </a:p>
+        </p:txBody>
       </p:sp>
       <p:pic>
         <p:nvPicPr>
-          <p:cNvPr id="7" name="Image 0" descr="preencoded.png">    </p:cNvPr>
+          <p:cNvPr id="7" name="Image 0" descr="preencoded.png"/>
           <p:cNvPicPr>
             <a:picLocks noChangeAspect="1"/>
           </p:cNvPicPr>
           <p:nvPr/>
         </p:nvPicPr>
         <p:blipFill>
-          <a:blip r:embed="rId1"/>
+          <a:blip r:embed="rId3"/>
           <a:stretch>
             <a:fillRect/>
           </a:stretch>
@@ -5859,7 +5727,7 @@
           <a:bodyPr wrap="square" lIns="0" tIns="0" rIns="0" bIns="0" rtlCol="0" anchor="ctr"/>
           <a:lstStyle/>
           <a:p>
-            <a:pPr indent="0" marL="0">
+            <a:pPr marL="0" indent="0">
               <a:buNone/>
             </a:pPr>
             <a:r>
@@ -5898,7 +5766,7 @@
           <a:bodyPr wrap="square" lIns="0" tIns="0" rIns="0" bIns="0" rtlCol="0" anchor="ctr"/>
           <a:lstStyle/>
           <a:p>
-            <a:pPr indent="0" marL="0">
+            <a:pPr marL="0" indent="0">
               <a:buNone/>
             </a:pPr>
             <a:r>
@@ -5915,7 +5783,7 @@
             <a:endParaRPr lang="en-US" sz="1100" dirty="0"/>
           </a:p>
           <a:p>
-            <a:pPr indent="0" marL="0">
+            <a:pPr marL="0" indent="0">
               <a:buNone/>
             </a:pPr>
             <a:r>
@@ -5957,24 +5825,31 @@
             <a:prstDash val="solid"/>
           </a:ln>
           <a:effectLst>
-            <a:outerShdw sx="100000" sy="100000" kx="0" ky="0" algn="bl" rotWithShape="0" blurRad="76200" dist="25400" dir="8100000">
+            <a:outerShdw blurRad="76200" dist="25400" dir="8100000" algn="bl" rotWithShape="0">
               <a:srgbClr val="000000">
                 <a:alpha val="8000"/>
               </a:srgbClr>
             </a:outerShdw>
           </a:effectLst>
         </p:spPr>
+        <p:txBody>
+          <a:bodyPr/>
+          <a:lstStyle/>
+          <a:p>
+            <a:endParaRPr lang="en-US"/>
+          </a:p>
+        </p:txBody>
       </p:sp>
       <p:pic>
         <p:nvPicPr>
-          <p:cNvPr id="11" name="Image 1" descr="preencoded.png">    </p:cNvPr>
+          <p:cNvPr id="11" name="Image 1" descr="preencoded.png"/>
           <p:cNvPicPr>
             <a:picLocks noChangeAspect="1"/>
           </p:cNvPicPr>
           <p:nvPr/>
         </p:nvPicPr>
         <p:blipFill>
-          <a:blip r:embed="rId2"/>
+          <a:blip r:embed="rId4"/>
           <a:stretch>
             <a:fillRect/>
           </a:stretch>
@@ -6010,7 +5885,7 @@
           <a:bodyPr wrap="square" lIns="0" tIns="0" rIns="0" bIns="0" rtlCol="0" anchor="ctr"/>
           <a:lstStyle/>
           <a:p>
-            <a:pPr indent="0" marL="0">
+            <a:pPr marL="0" indent="0">
               <a:buNone/>
             </a:pPr>
             <a:r>
@@ -6049,7 +5924,7 @@
           <a:bodyPr wrap="square" lIns="0" tIns="0" rIns="0" bIns="0" rtlCol="0" anchor="ctr"/>
           <a:lstStyle/>
           <a:p>
-            <a:pPr indent="0" marL="0">
+            <a:pPr marL="0" indent="0">
               <a:buNone/>
             </a:pPr>
             <a:r>
@@ -6066,7 +5941,7 @@
             <a:endParaRPr lang="en-US" sz="1100" dirty="0"/>
           </a:p>
           <a:p>
-            <a:pPr indent="0" marL="0">
+            <a:pPr marL="0" indent="0">
               <a:buNone/>
             </a:pPr>
             <a:r>
@@ -6108,24 +5983,31 @@
             <a:prstDash val="solid"/>
           </a:ln>
           <a:effectLst>
-            <a:outerShdw sx="100000" sy="100000" kx="0" ky="0" algn="bl" rotWithShape="0" blurRad="76200" dist="25400" dir="8100000">
+            <a:outerShdw blurRad="76200" dist="25400" dir="8100000" algn="bl" rotWithShape="0">
               <a:srgbClr val="000000">
                 <a:alpha val="8000"/>
               </a:srgbClr>
             </a:outerShdw>
           </a:effectLst>
         </p:spPr>
+        <p:txBody>
+          <a:bodyPr/>
+          <a:lstStyle/>
+          <a:p>
+            <a:endParaRPr lang="en-US"/>
+          </a:p>
+        </p:txBody>
       </p:sp>
       <p:pic>
         <p:nvPicPr>
-          <p:cNvPr id="15" name="Image 2" descr="preencoded.png">    </p:cNvPr>
+          <p:cNvPr id="15" name="Image 2" descr="preencoded.png"/>
           <p:cNvPicPr>
             <a:picLocks noChangeAspect="1"/>
           </p:cNvPicPr>
           <p:nvPr/>
         </p:nvPicPr>
         <p:blipFill>
-          <a:blip r:embed="rId3"/>
+          <a:blip r:embed="rId5"/>
           <a:stretch>
             <a:fillRect/>
           </a:stretch>
@@ -6161,7 +6043,7 @@
           <a:bodyPr wrap="square" lIns="0" tIns="0" rIns="0" bIns="0" rtlCol="0" anchor="ctr"/>
           <a:lstStyle/>
           <a:p>
-            <a:pPr indent="0" marL="0">
+            <a:pPr marL="0" indent="0">
               <a:buNone/>
             </a:pPr>
             <a:r>
@@ -6200,7 +6082,7 @@
           <a:bodyPr wrap="square" lIns="0" tIns="0" rIns="0" bIns="0" rtlCol="0" anchor="ctr"/>
           <a:lstStyle/>
           <a:p>
-            <a:pPr indent="0" marL="0">
+            <a:pPr marL="0" indent="0">
               <a:buNone/>
             </a:pPr>
             <a:r>
@@ -6217,7 +6099,7 @@
             <a:endParaRPr lang="en-US" sz="1100" dirty="0"/>
           </a:p>
           <a:p>
-            <a:pPr indent="0" marL="0">
+            <a:pPr marL="0" indent="0">
               <a:buNone/>
             </a:pPr>
             <a:r>
@@ -6256,7 +6138,7 @@
           <a:bodyPr wrap="square" lIns="0" tIns="0" rIns="0" bIns="0" rtlCol="0" anchor="ctr"/>
           <a:lstStyle/>
           <a:p>
-            <a:pPr indent="0" marL="0">
+            <a:pPr marL="0" indent="0">
               <a:buNone/>
             </a:pPr>
             <a:r>
@@ -6295,7 +6177,7 @@
           <a:bodyPr wrap="square" lIns="0" tIns="0" rIns="0" bIns="0" rtlCol="0" anchor="ctr"/>
           <a:lstStyle/>
           <a:p>
-            <a:pPr algn="r" indent="0" marL="0">
+            <a:pPr marL="0" indent="0" algn="r">
               <a:buNone/>
             </a:pPr>
             <a:r>
@@ -6329,6 +6211,7 @@
         <a:solidFill>
           <a:srgbClr val="FFFFFF"/>
         </a:solidFill>
+        <a:effectLst/>
       </p:bgPr>
     </p:bg>
     <p:spTree>
@@ -6366,7 +6249,7 @@
           <a:bodyPr wrap="square" lIns="0" tIns="0" rIns="0" bIns="0" rtlCol="0" anchor="ctr"/>
           <a:lstStyle/>
           <a:p>
-            <a:pPr indent="0" marL="0">
+            <a:pPr marL="0" indent="0">
               <a:buNone/>
             </a:pPr>
             <a:r>
@@ -6386,211 +6269,7 @@
       </p:sp>
       <p:pic>
         <p:nvPicPr>
-          <p:cNvPr id="3" name="Image 0" descr="preencoded.png">    </p:cNvPr>
-          <p:cNvPicPr>
-            <a:picLocks noChangeAspect="1"/>
-          </p:cNvPicPr>
-          <p:nvPr/>
-        </p:nvPicPr>
-        <p:blipFill>
-          <a:blip r:embed="rId1"/>
-          <a:stretch>
-            <a:fillRect/>
-          </a:stretch>
-        </p:blipFill>
-        <p:spPr>
-          <a:xfrm>
-            <a:off x="548640" y="1417320"/>
-            <a:ext cx="457200" cy="457200"/>
-          </a:xfrm>
-          <a:prstGeom prst="rect">
-            <a:avLst/>
-          </a:prstGeom>
-        </p:spPr>
-      </p:pic>
-      <p:sp>
-        <p:nvSpPr>
-          <p:cNvPr id="4" name="Text 1"/>
-          <p:cNvSpPr/>
-          <p:nvPr/>
-        </p:nvSpPr>
-        <p:spPr>
-          <a:xfrm>
-            <a:off x="1143000" y="1325880"/>
-            <a:ext cx="3383280" cy="365760"/>
-          </a:xfrm>
-          <a:prstGeom prst="rect">
-            <a:avLst/>
-          </a:prstGeom>
-          <a:noFill/>
-          <a:ln/>
-        </p:spPr>
-        <p:txBody>
-          <a:bodyPr wrap="square" lIns="0" tIns="0" rIns="0" bIns="0" rtlCol="0" anchor="ctr"/>
-          <a:lstStyle/>
-          <a:p>
-            <a:pPr indent="0" marL="0">
-              <a:buNone/>
-            </a:pPr>
-            <a:r>
-              <a:rPr lang="en-US" sz="1500" b="1" dirty="0">
-                <a:solidFill>
-                  <a:srgbClr val="1E2761"/>
-                </a:solidFill>
-                <a:latin typeface="Calibri" pitchFamily="34" charset="0"/>
-                <a:ea typeface="Calibri" pitchFamily="34" charset="-122"/>
-                <a:cs typeface="Calibri" pitchFamily="34" charset="-120"/>
-              </a:rPr>
-              <a:t>Python 3.10+</a:t>
-            </a:r>
-            <a:endParaRPr lang="en-US" sz="1500" dirty="0"/>
-          </a:p>
-        </p:txBody>
-      </p:sp>
-      <p:sp>
-        <p:nvSpPr>
-          <p:cNvPr id="5" name="Text 2"/>
-          <p:cNvSpPr/>
-          <p:nvPr/>
-        </p:nvSpPr>
-        <p:spPr>
-          <a:xfrm>
-            <a:off x="1143000" y="1691640"/>
-            <a:ext cx="3383280" cy="457200"/>
-          </a:xfrm>
-          <a:prstGeom prst="rect">
-            <a:avLst/>
-          </a:prstGeom>
-          <a:noFill/>
-          <a:ln/>
-        </p:spPr>
-        <p:txBody>
-          <a:bodyPr wrap="square" lIns="0" tIns="0" rIns="0" bIns="0" rtlCol="0" anchor="ctr"/>
-          <a:lstStyle/>
-          <a:p>
-            <a:pPr indent="0" marL="0">
-              <a:buNone/>
-            </a:pPr>
-            <a:r>
-              <a:rPr lang="en-US" sz="1100" dirty="0">
-                <a:solidFill>
-                  <a:srgbClr val="2B2D42"/>
-                </a:solidFill>
-                <a:latin typeface="Calibri" pitchFamily="34" charset="0"/>
-                <a:ea typeface="Calibri" pitchFamily="34" charset="-122"/>
-                <a:cs typeface="Calibri" pitchFamily="34" charset="-120"/>
-              </a:rPr>
-              <a:t>Core language for the whole project</a:t>
-            </a:r>
-            <a:endParaRPr lang="en-US" sz="1100" dirty="0"/>
-          </a:p>
-        </p:txBody>
-      </p:sp>
-      <p:pic>
-        <p:nvPicPr>
-          <p:cNvPr id="6" name="Image 1" descr="preencoded.png">    </p:cNvPr>
-          <p:cNvPicPr>
-            <a:picLocks noChangeAspect="1"/>
-          </p:cNvPicPr>
-          <p:nvPr/>
-        </p:nvPicPr>
-        <p:blipFill>
-          <a:blip r:embed="rId2"/>
-          <a:stretch>
-            <a:fillRect/>
-          </a:stretch>
-        </p:blipFill>
-        <p:spPr>
-          <a:xfrm>
-            <a:off x="4754880" y="1417320"/>
-            <a:ext cx="457200" cy="457200"/>
-          </a:xfrm>
-          <a:prstGeom prst="rect">
-            <a:avLst/>
-          </a:prstGeom>
-        </p:spPr>
-      </p:pic>
-      <p:sp>
-        <p:nvSpPr>
-          <p:cNvPr id="7" name="Text 3"/>
-          <p:cNvSpPr/>
-          <p:nvPr/>
-        </p:nvSpPr>
-        <p:spPr>
-          <a:xfrm>
-            <a:off x="5349240" y="1325880"/>
-            <a:ext cx="3383280" cy="365760"/>
-          </a:xfrm>
-          <a:prstGeom prst="rect">
-            <a:avLst/>
-          </a:prstGeom>
-          <a:noFill/>
-          <a:ln/>
-        </p:spPr>
-        <p:txBody>
-          <a:bodyPr wrap="square" lIns="0" tIns="0" rIns="0" bIns="0" rtlCol="0" anchor="ctr"/>
-          <a:lstStyle/>
-          <a:p>
-            <a:pPr indent="0" marL="0">
-              <a:buNone/>
-            </a:pPr>
-            <a:r>
-              <a:rPr lang="en-US" sz="1500" b="1" dirty="0">
-                <a:solidFill>
-                  <a:srgbClr val="1E2761"/>
-                </a:solidFill>
-                <a:latin typeface="Calibri" pitchFamily="34" charset="0"/>
-                <a:ea typeface="Calibri" pitchFamily="34" charset="-122"/>
-                <a:cs typeface="Calibri" pitchFamily="34" charset="-120"/>
-              </a:rPr>
-              <a:t>yfinance</a:t>
-            </a:r>
-            <a:endParaRPr lang="en-US" sz="1500" dirty="0"/>
-          </a:p>
-        </p:txBody>
-      </p:sp>
-      <p:sp>
-        <p:nvSpPr>
-          <p:cNvPr id="8" name="Text 4"/>
-          <p:cNvSpPr/>
-          <p:nvPr/>
-        </p:nvSpPr>
-        <p:spPr>
-          <a:xfrm>
-            <a:off x="5349240" y="1691640"/>
-            <a:ext cx="3383280" cy="457200"/>
-          </a:xfrm>
-          <a:prstGeom prst="rect">
-            <a:avLst/>
-          </a:prstGeom>
-          <a:noFill/>
-          <a:ln/>
-        </p:spPr>
-        <p:txBody>
-          <a:bodyPr wrap="square" lIns="0" tIns="0" rIns="0" bIns="0" rtlCol="0" anchor="ctr"/>
-          <a:lstStyle/>
-          <a:p>
-            <a:pPr indent="0" marL="0">
-              <a:buNone/>
-            </a:pPr>
-            <a:r>
-              <a:rPr lang="en-US" sz="1100" dirty="0">
-                <a:solidFill>
-                  <a:srgbClr val="2B2D42"/>
-                </a:solidFill>
-                <a:latin typeface="Calibri" pitchFamily="34" charset="0"/>
-                <a:ea typeface="Calibri" pitchFamily="34" charset="-122"/>
-                <a:cs typeface="Calibri" pitchFamily="34" charset="-120"/>
-              </a:rPr>
-              <a:t>Downloads live stock history from Yahoo Finance</a:t>
-            </a:r>
-            <a:endParaRPr lang="en-US" sz="1100" dirty="0"/>
-          </a:p>
-        </p:txBody>
-      </p:sp>
-      <p:pic>
-        <p:nvPicPr>
-          <p:cNvPr id="9" name="Image 2" descr="preencoded.png">    </p:cNvPr>
+          <p:cNvPr id="3" name="Image 0" descr="preencoded.png"/>
           <p:cNvPicPr>
             <a:picLocks noChangeAspect="1"/>
           </p:cNvPicPr>
@@ -6604,7 +6283,7 @@
         </p:blipFill>
         <p:spPr>
           <a:xfrm>
-            <a:off x="548640" y="2468880"/>
+            <a:off x="548640" y="1417320"/>
             <a:ext cx="457200" cy="457200"/>
           </a:xfrm>
           <a:prstGeom prst="rect">
@@ -6614,13 +6293,13 @@
       </p:pic>
       <p:sp>
         <p:nvSpPr>
-          <p:cNvPr id="10" name="Text 5"/>
-          <p:cNvSpPr/>
-          <p:nvPr/>
-        </p:nvSpPr>
-        <p:spPr>
-          <a:xfrm>
-            <a:off x="1143000" y="2377440"/>
+          <p:cNvPr id="4" name="Text 1"/>
+          <p:cNvSpPr/>
+          <p:nvPr/>
+        </p:nvSpPr>
+        <p:spPr>
+          <a:xfrm>
+            <a:off x="1143000" y="1325880"/>
             <a:ext cx="3383280" cy="365760"/>
           </a:xfrm>
           <a:prstGeom prst="rect">
@@ -6633,7 +6312,7 @@
           <a:bodyPr wrap="square" lIns="0" tIns="0" rIns="0" bIns="0" rtlCol="0" anchor="ctr"/>
           <a:lstStyle/>
           <a:p>
-            <a:pPr indent="0" marL="0">
+            <a:pPr marL="0" indent="0">
               <a:buNone/>
             </a:pPr>
             <a:r>
@@ -6645,7 +6324,7 @@
                 <a:ea typeface="Calibri" pitchFamily="34" charset="-122"/>
                 <a:cs typeface="Calibri" pitchFamily="34" charset="-120"/>
               </a:rPr>
-              <a:t>pandas + NumPy</a:t>
+              <a:t>Python 3.14</a:t>
             </a:r>
             <a:endParaRPr lang="en-US" sz="1500" dirty="0"/>
           </a:p>
@@ -6653,13 +6332,13 @@
       </p:sp>
       <p:sp>
         <p:nvSpPr>
-          <p:cNvPr id="11" name="Text 6"/>
-          <p:cNvSpPr/>
-          <p:nvPr/>
-        </p:nvSpPr>
-        <p:spPr>
-          <a:xfrm>
-            <a:off x="1143000" y="2743200"/>
+          <p:cNvPr id="5" name="Text 2"/>
+          <p:cNvSpPr/>
+          <p:nvPr/>
+        </p:nvSpPr>
+        <p:spPr>
+          <a:xfrm>
+            <a:off x="1143000" y="1691640"/>
             <a:ext cx="3383280" cy="457200"/>
           </a:xfrm>
           <a:prstGeom prst="rect">
@@ -6672,7 +6351,7 @@
           <a:bodyPr wrap="square" lIns="0" tIns="0" rIns="0" bIns="0" rtlCol="0" anchor="ctr"/>
           <a:lstStyle/>
           <a:p>
-            <a:pPr indent="0" marL="0">
+            <a:pPr marL="0" indent="0">
               <a:buNone/>
             </a:pPr>
             <a:r>
@@ -6684,7 +6363,7 @@
                 <a:ea typeface="Calibri" pitchFamily="34" charset="-122"/>
                 <a:cs typeface="Calibri" pitchFamily="34" charset="-120"/>
               </a:rPr>
-              <a:t>Data manipulation, time-series math, indicator calculations</a:t>
+              <a:t>Core language for the whole project</a:t>
             </a:r>
             <a:endParaRPr lang="en-US" sz="1100" dirty="0"/>
           </a:p>
@@ -6692,7 +6371,7 @@
       </p:sp>
       <p:pic>
         <p:nvPicPr>
-          <p:cNvPr id="12" name="Image 3" descr="preencoded.png">    </p:cNvPr>
+          <p:cNvPr id="6" name="Image 1" descr="preencoded.png"/>
           <p:cNvPicPr>
             <a:picLocks noChangeAspect="1"/>
           </p:cNvPicPr>
@@ -6706,7 +6385,7 @@
         </p:blipFill>
         <p:spPr>
           <a:xfrm>
-            <a:off x="4754880" y="2468880"/>
+            <a:off x="4754880" y="1417320"/>
             <a:ext cx="457200" cy="457200"/>
           </a:xfrm>
           <a:prstGeom prst="rect">
@@ -6716,13 +6395,13 @@
       </p:pic>
       <p:sp>
         <p:nvSpPr>
-          <p:cNvPr id="13" name="Text 7"/>
-          <p:cNvSpPr/>
-          <p:nvPr/>
-        </p:nvSpPr>
-        <p:spPr>
-          <a:xfrm>
-            <a:off x="5349240" y="2377440"/>
+          <p:cNvPr id="7" name="Text 3"/>
+          <p:cNvSpPr/>
+          <p:nvPr/>
+        </p:nvSpPr>
+        <p:spPr>
+          <a:xfrm>
+            <a:off x="5349240" y="1325880"/>
             <a:ext cx="3383280" cy="365760"/>
           </a:xfrm>
           <a:prstGeom prst="rect">
@@ -6735,7 +6414,7 @@
           <a:bodyPr wrap="square" lIns="0" tIns="0" rIns="0" bIns="0" rtlCol="0" anchor="ctr"/>
           <a:lstStyle/>
           <a:p>
-            <a:pPr indent="0" marL="0">
+            <a:pPr marL="0" indent="0">
               <a:buNone/>
             </a:pPr>
             <a:r>
@@ -6747,7 +6426,7 @@
                 <a:ea typeface="Calibri" pitchFamily="34" charset="-122"/>
                 <a:cs typeface="Calibri" pitchFamily="34" charset="-120"/>
               </a:rPr>
-              <a:t>matplotlib</a:t>
+              <a:t>yfinance</a:t>
             </a:r>
             <a:endParaRPr lang="en-US" sz="1500" dirty="0"/>
           </a:p>
@@ -6755,13 +6434,13 @@
       </p:sp>
       <p:sp>
         <p:nvSpPr>
-          <p:cNvPr id="14" name="Text 8"/>
-          <p:cNvSpPr/>
-          <p:nvPr/>
-        </p:nvSpPr>
-        <p:spPr>
-          <a:xfrm>
-            <a:off x="5349240" y="2743200"/>
+          <p:cNvPr id="8" name="Text 4"/>
+          <p:cNvSpPr/>
+          <p:nvPr/>
+        </p:nvSpPr>
+        <p:spPr>
+          <a:xfrm>
+            <a:off x="5349240" y="1691640"/>
             <a:ext cx="3383280" cy="457200"/>
           </a:xfrm>
           <a:prstGeom prst="rect">
@@ -6774,7 +6453,7 @@
           <a:bodyPr wrap="square" lIns="0" tIns="0" rIns="0" bIns="0" rtlCol="0" anchor="ctr"/>
           <a:lstStyle/>
           <a:p>
-            <a:pPr indent="0" marL="0">
+            <a:pPr marL="0" indent="0">
               <a:buNone/>
             </a:pPr>
             <a:r>
@@ -6786,7 +6465,7 @@
                 <a:ea typeface="Calibri" pitchFamily="34" charset="-122"/>
                 <a:cs typeface="Calibri" pitchFamily="34" charset="-120"/>
               </a:rPr>
-              <a:t>Renders the 1-year price chart with moving averages</a:t>
+              <a:t>Downloads live stock history from Yahoo Finance</a:t>
             </a:r>
             <a:endParaRPr lang="en-US" sz="1100" dirty="0"/>
           </a:p>
@@ -6794,7 +6473,7 @@
       </p:sp>
       <p:pic>
         <p:nvPicPr>
-          <p:cNvPr id="15" name="Image 4" descr="preencoded.png">    </p:cNvPr>
+          <p:cNvPr id="9" name="Image 2" descr="preencoded.png"/>
           <p:cNvPicPr>
             <a:picLocks noChangeAspect="1"/>
           </p:cNvPicPr>
@@ -6808,7 +6487,7 @@
         </p:blipFill>
         <p:spPr>
           <a:xfrm>
-            <a:off x="548640" y="3520440"/>
+            <a:off x="548640" y="2468880"/>
             <a:ext cx="457200" cy="457200"/>
           </a:xfrm>
           <a:prstGeom prst="rect">
@@ -6818,13 +6497,13 @@
       </p:pic>
       <p:sp>
         <p:nvSpPr>
-          <p:cNvPr id="16" name="Text 9"/>
-          <p:cNvSpPr/>
-          <p:nvPr/>
-        </p:nvSpPr>
-        <p:spPr>
-          <a:xfrm>
-            <a:off x="1143000" y="3429000"/>
+          <p:cNvPr id="10" name="Text 5"/>
+          <p:cNvSpPr/>
+          <p:nvPr/>
+        </p:nvSpPr>
+        <p:spPr>
+          <a:xfrm>
+            <a:off x="1143000" y="2377440"/>
             <a:ext cx="3383280" cy="365760"/>
           </a:xfrm>
           <a:prstGeom prst="rect">
@@ -6837,7 +6516,7 @@
           <a:bodyPr wrap="square" lIns="0" tIns="0" rIns="0" bIns="0" rtlCol="0" anchor="ctr"/>
           <a:lstStyle/>
           <a:p>
-            <a:pPr indent="0" marL="0">
+            <a:pPr marL="0" indent="0">
               <a:buNone/>
             </a:pPr>
             <a:r>
@@ -6849,7 +6528,7 @@
                 <a:ea typeface="Calibri" pitchFamily="34" charset="-122"/>
                 <a:cs typeface="Calibri" pitchFamily="34" charset="-120"/>
               </a:rPr>
-              <a:t>Git / GitHub</a:t>
+              <a:t>pandas + NumPy</a:t>
             </a:r>
             <a:endParaRPr lang="en-US" sz="1500" dirty="0"/>
           </a:p>
@@ -6857,13 +6536,13 @@
       </p:sp>
       <p:sp>
         <p:nvSpPr>
-          <p:cNvPr id="17" name="Text 10"/>
-          <p:cNvSpPr/>
-          <p:nvPr/>
-        </p:nvSpPr>
-        <p:spPr>
-          <a:xfrm>
-            <a:off x="1143000" y="3794760"/>
+          <p:cNvPr id="11" name="Text 6"/>
+          <p:cNvSpPr/>
+          <p:nvPr/>
+        </p:nvSpPr>
+        <p:spPr>
+          <a:xfrm>
+            <a:off x="1143000" y="2743200"/>
             <a:ext cx="3383280" cy="457200"/>
           </a:xfrm>
           <a:prstGeom prst="rect">
@@ -6876,7 +6555,7 @@
           <a:bodyPr wrap="square" lIns="0" tIns="0" rIns="0" bIns="0" rtlCol="0" anchor="ctr"/>
           <a:lstStyle/>
           <a:p>
-            <a:pPr indent="0" marL="0">
+            <a:pPr marL="0" indent="0">
               <a:buNone/>
             </a:pPr>
             <a:r>
@@ -6888,7 +6567,7 @@
                 <a:ea typeface="Calibri" pitchFamily="34" charset="-122"/>
                 <a:cs typeface="Calibri" pitchFamily="34" charset="-120"/>
               </a:rPr>
-              <a:t>Version control and code hosting</a:t>
+              <a:t>Data manipulation, time-series math, indicator calculations</a:t>
             </a:r>
             <a:endParaRPr lang="en-US" sz="1100" dirty="0"/>
           </a:p>
@@ -6896,7 +6575,7 @@
       </p:sp>
       <p:pic>
         <p:nvPicPr>
-          <p:cNvPr id="18" name="Image 5" descr="preencoded.png">    </p:cNvPr>
+          <p:cNvPr id="12" name="Image 3" descr="preencoded.png"/>
           <p:cNvPicPr>
             <a:picLocks noChangeAspect="1"/>
           </p:cNvPicPr>
@@ -6910,6 +6589,210 @@
         </p:blipFill>
         <p:spPr>
           <a:xfrm>
+            <a:off x="4754880" y="2468880"/>
+            <a:ext cx="457200" cy="457200"/>
+          </a:xfrm>
+          <a:prstGeom prst="rect">
+            <a:avLst/>
+          </a:prstGeom>
+        </p:spPr>
+      </p:pic>
+      <p:sp>
+        <p:nvSpPr>
+          <p:cNvPr id="13" name="Text 7"/>
+          <p:cNvSpPr/>
+          <p:nvPr/>
+        </p:nvSpPr>
+        <p:spPr>
+          <a:xfrm>
+            <a:off x="5349240" y="2377440"/>
+            <a:ext cx="3383280" cy="365760"/>
+          </a:xfrm>
+          <a:prstGeom prst="rect">
+            <a:avLst/>
+          </a:prstGeom>
+          <a:noFill/>
+          <a:ln/>
+        </p:spPr>
+        <p:txBody>
+          <a:bodyPr wrap="square" lIns="0" tIns="0" rIns="0" bIns="0" rtlCol="0" anchor="ctr"/>
+          <a:lstStyle/>
+          <a:p>
+            <a:pPr marL="0" indent="0">
+              <a:buNone/>
+            </a:pPr>
+            <a:r>
+              <a:rPr lang="en-US" sz="1500" b="1" dirty="0">
+                <a:solidFill>
+                  <a:srgbClr val="1E2761"/>
+                </a:solidFill>
+                <a:latin typeface="Calibri" pitchFamily="34" charset="0"/>
+                <a:ea typeface="Calibri" pitchFamily="34" charset="-122"/>
+                <a:cs typeface="Calibri" pitchFamily="34" charset="-120"/>
+              </a:rPr>
+              <a:t>matplotlib</a:t>
+            </a:r>
+            <a:endParaRPr lang="en-US" sz="1500" dirty="0"/>
+          </a:p>
+        </p:txBody>
+      </p:sp>
+      <p:sp>
+        <p:nvSpPr>
+          <p:cNvPr id="14" name="Text 8"/>
+          <p:cNvSpPr/>
+          <p:nvPr/>
+        </p:nvSpPr>
+        <p:spPr>
+          <a:xfrm>
+            <a:off x="5349240" y="2743200"/>
+            <a:ext cx="3383280" cy="457200"/>
+          </a:xfrm>
+          <a:prstGeom prst="rect">
+            <a:avLst/>
+          </a:prstGeom>
+          <a:noFill/>
+          <a:ln/>
+        </p:spPr>
+        <p:txBody>
+          <a:bodyPr wrap="square" lIns="0" tIns="0" rIns="0" bIns="0" rtlCol="0" anchor="ctr"/>
+          <a:lstStyle/>
+          <a:p>
+            <a:pPr marL="0" indent="0">
+              <a:buNone/>
+            </a:pPr>
+            <a:r>
+              <a:rPr lang="en-US" sz="1100" dirty="0">
+                <a:solidFill>
+                  <a:srgbClr val="2B2D42"/>
+                </a:solidFill>
+                <a:latin typeface="Calibri" pitchFamily="34" charset="0"/>
+                <a:ea typeface="Calibri" pitchFamily="34" charset="-122"/>
+                <a:cs typeface="Calibri" pitchFamily="34" charset="-120"/>
+              </a:rPr>
+              <a:t>Renders the 1-year price chart with moving averages</a:t>
+            </a:r>
+            <a:endParaRPr lang="en-US" sz="1100" dirty="0"/>
+          </a:p>
+        </p:txBody>
+      </p:sp>
+      <p:pic>
+        <p:nvPicPr>
+          <p:cNvPr id="15" name="Image 4" descr="preencoded.png"/>
+          <p:cNvPicPr>
+            <a:picLocks noChangeAspect="1"/>
+          </p:cNvPicPr>
+          <p:nvPr/>
+        </p:nvPicPr>
+        <p:blipFill>
+          <a:blip r:embed="rId7"/>
+          <a:stretch>
+            <a:fillRect/>
+          </a:stretch>
+        </p:blipFill>
+        <p:spPr>
+          <a:xfrm>
+            <a:off x="548640" y="3520440"/>
+            <a:ext cx="457200" cy="457200"/>
+          </a:xfrm>
+          <a:prstGeom prst="rect">
+            <a:avLst/>
+          </a:prstGeom>
+        </p:spPr>
+      </p:pic>
+      <p:sp>
+        <p:nvSpPr>
+          <p:cNvPr id="16" name="Text 9"/>
+          <p:cNvSpPr/>
+          <p:nvPr/>
+        </p:nvSpPr>
+        <p:spPr>
+          <a:xfrm>
+            <a:off x="1143000" y="3429000"/>
+            <a:ext cx="3383280" cy="365760"/>
+          </a:xfrm>
+          <a:prstGeom prst="rect">
+            <a:avLst/>
+          </a:prstGeom>
+          <a:noFill/>
+          <a:ln/>
+        </p:spPr>
+        <p:txBody>
+          <a:bodyPr wrap="square" lIns="0" tIns="0" rIns="0" bIns="0" rtlCol="0" anchor="ctr"/>
+          <a:lstStyle/>
+          <a:p>
+            <a:pPr marL="0" indent="0">
+              <a:buNone/>
+            </a:pPr>
+            <a:r>
+              <a:rPr lang="en-US" sz="1500" b="1" dirty="0">
+                <a:solidFill>
+                  <a:srgbClr val="1E2761"/>
+                </a:solidFill>
+                <a:latin typeface="Calibri" pitchFamily="34" charset="0"/>
+                <a:ea typeface="Calibri" pitchFamily="34" charset="-122"/>
+                <a:cs typeface="Calibri" pitchFamily="34" charset="-120"/>
+              </a:rPr>
+              <a:t>Git / GitHub</a:t>
+            </a:r>
+            <a:endParaRPr lang="en-US" sz="1500" dirty="0"/>
+          </a:p>
+        </p:txBody>
+      </p:sp>
+      <p:sp>
+        <p:nvSpPr>
+          <p:cNvPr id="17" name="Text 10"/>
+          <p:cNvSpPr/>
+          <p:nvPr/>
+        </p:nvSpPr>
+        <p:spPr>
+          <a:xfrm>
+            <a:off x="1143000" y="3794760"/>
+            <a:ext cx="3383280" cy="457200"/>
+          </a:xfrm>
+          <a:prstGeom prst="rect">
+            <a:avLst/>
+          </a:prstGeom>
+          <a:noFill/>
+          <a:ln/>
+        </p:spPr>
+        <p:txBody>
+          <a:bodyPr wrap="square" lIns="0" tIns="0" rIns="0" bIns="0" rtlCol="0" anchor="ctr"/>
+          <a:lstStyle/>
+          <a:p>
+            <a:pPr marL="0" indent="0">
+              <a:buNone/>
+            </a:pPr>
+            <a:r>
+              <a:rPr lang="en-US" sz="1100" dirty="0">
+                <a:solidFill>
+                  <a:srgbClr val="2B2D42"/>
+                </a:solidFill>
+                <a:latin typeface="Calibri" pitchFamily="34" charset="0"/>
+                <a:ea typeface="Calibri" pitchFamily="34" charset="-122"/>
+                <a:cs typeface="Calibri" pitchFamily="34" charset="-120"/>
+              </a:rPr>
+              <a:t>Version control and code hosting</a:t>
+            </a:r>
+            <a:endParaRPr lang="en-US" sz="1100" dirty="0"/>
+          </a:p>
+        </p:txBody>
+      </p:sp>
+      <p:pic>
+        <p:nvPicPr>
+          <p:cNvPr id="18" name="Image 5" descr="preencoded.png"/>
+          <p:cNvPicPr>
+            <a:picLocks noChangeAspect="1"/>
+          </p:cNvPicPr>
+          <p:nvPr/>
+        </p:nvPicPr>
+        <p:blipFill>
+          <a:blip r:embed="rId8"/>
+          <a:stretch>
+            <a:fillRect/>
+          </a:stretch>
+        </p:blipFill>
+        <p:spPr>
+          <a:xfrm>
             <a:off x="4754880" y="3520440"/>
             <a:ext cx="457200" cy="457200"/>
           </a:xfrm>
@@ -6939,7 +6822,7 @@
           <a:bodyPr wrap="square" lIns="0" tIns="0" rIns="0" bIns="0" rtlCol="0" anchor="ctr"/>
           <a:lstStyle/>
           <a:p>
-            <a:pPr indent="0" marL="0">
+            <a:pPr marL="0" indent="0">
               <a:buNone/>
             </a:pPr>
             <a:r>
@@ -6978,7 +6861,7 @@
           <a:bodyPr wrap="square" lIns="0" tIns="0" rIns="0" bIns="0" rtlCol="0" anchor="ctr"/>
           <a:lstStyle/>
           <a:p>
-            <a:pPr indent="0" marL="0">
+            <a:pPr marL="0" indent="0">
               <a:buNone/>
             </a:pPr>
             <a:r>
@@ -7017,7 +6900,7 @@
           <a:bodyPr wrap="square" lIns="0" tIns="0" rIns="0" bIns="0" rtlCol="0" anchor="ctr"/>
           <a:lstStyle/>
           <a:p>
-            <a:pPr indent="0" marL="0">
+            <a:pPr marL="0" indent="0">
               <a:buNone/>
             </a:pPr>
             <a:r>
@@ -7056,7 +6939,7 @@
           <a:bodyPr wrap="square" lIns="0" tIns="0" rIns="0" bIns="0" rtlCol="0" anchor="ctr"/>
           <a:lstStyle/>
           <a:p>
-            <a:pPr algn="r" indent="0" marL="0">
+            <a:pPr marL="0" indent="0" algn="r">
               <a:buNone/>
             </a:pPr>
             <a:r>
@@ -7090,6 +6973,7 @@
         <a:solidFill>
           <a:srgbClr val="FFFFFF"/>
         </a:solidFill>
+        <a:effectLst/>
       </p:bgPr>
     </p:bg>
     <p:spTree>
@@ -7127,7 +7011,7 @@
           <a:bodyPr wrap="square" lIns="0" tIns="0" rIns="0" bIns="0" rtlCol="0" anchor="ctr"/>
           <a:lstStyle/>
           <a:p>
-            <a:pPr indent="0" marL="0">
+            <a:pPr marL="0" indent="0">
               <a:buNone/>
             </a:pPr>
             <a:r>
@@ -7166,7 +7050,7 @@
           <a:bodyPr wrap="square" lIns="0" tIns="0" rIns="0" bIns="0" rtlCol="0" anchor="ctr"/>
           <a:lstStyle/>
           <a:p>
-            <a:pPr indent="0" marL="0">
+            <a:pPr marL="0" indent="0">
               <a:buNone/>
             </a:pPr>
             <a:r>
@@ -7203,6 +7087,13 @@
           </a:solidFill>
           <a:ln/>
         </p:spPr>
+        <p:txBody>
+          <a:bodyPr/>
+          <a:lstStyle/>
+          <a:p>
+            <a:endParaRPr lang="en-US"/>
+          </a:p>
+        </p:txBody>
       </p:sp>
       <p:sp>
         <p:nvSpPr>
@@ -7225,7 +7116,7 @@
           <a:bodyPr wrap="square" lIns="0" tIns="0" rIns="0" bIns="0" rtlCol="0" anchor="ctr"/>
           <a:lstStyle/>
           <a:p>
-            <a:pPr algn="ctr" indent="0" marL="0">
+            <a:pPr marL="0" indent="0" algn="ctr">
               <a:buNone/>
             </a:pPr>
             <a:r>
@@ -7267,6 +7158,13 @@
             <a:prstDash val="solid"/>
           </a:ln>
         </p:spPr>
+        <p:txBody>
+          <a:bodyPr/>
+          <a:lstStyle/>
+          <a:p>
+            <a:endParaRPr lang="en-US"/>
+          </a:p>
+        </p:txBody>
       </p:sp>
       <p:sp>
         <p:nvSpPr>
@@ -7355,14 +7253,14 @@
       </p:sp>
       <p:pic>
         <p:nvPicPr>
-          <p:cNvPr id="8" name="Image 0" descr="preencoded.png">    </p:cNvPr>
+          <p:cNvPr id="8" name="Image 0" descr="preencoded.png"/>
           <p:cNvPicPr>
             <a:picLocks noChangeAspect="1"/>
           </p:cNvPicPr>
           <p:nvPr/>
         </p:nvPicPr>
         <p:blipFill>
-          <a:blip r:embed="rId1"/>
+          <a:blip r:embed="rId3"/>
           <a:stretch>
             <a:fillRect/>
           </a:stretch>
@@ -7396,6 +7294,13 @@
           </a:solidFill>
           <a:ln/>
         </p:spPr>
+        <p:txBody>
+          <a:bodyPr/>
+          <a:lstStyle/>
+          <a:p>
+            <a:endParaRPr lang="en-US"/>
+          </a:p>
+        </p:txBody>
       </p:sp>
       <p:sp>
         <p:nvSpPr>
@@ -7418,7 +7323,7 @@
           <a:bodyPr wrap="square" lIns="0" tIns="0" rIns="0" bIns="0" rtlCol="0" anchor="ctr"/>
           <a:lstStyle/>
           <a:p>
-            <a:pPr algn="ctr" indent="0" marL="0">
+            <a:pPr marL="0" indent="0" algn="ctr">
               <a:buNone/>
             </a:pPr>
             <a:r>
@@ -7460,6 +7365,13 @@
             <a:prstDash val="solid"/>
           </a:ln>
         </p:spPr>
+        <p:txBody>
+          <a:bodyPr/>
+          <a:lstStyle/>
+          <a:p>
+            <a:endParaRPr lang="en-US"/>
+          </a:p>
+        </p:txBody>
       </p:sp>
       <p:sp>
         <p:nvSpPr>
@@ -7569,14 +7481,14 @@
       </p:sp>
       <p:pic>
         <p:nvPicPr>
-          <p:cNvPr id="13" name="Image 1" descr="preencoded.png">    </p:cNvPr>
+          <p:cNvPr id="13" name="Image 1" descr="preencoded.png"/>
           <p:cNvPicPr>
             <a:picLocks noChangeAspect="1"/>
           </p:cNvPicPr>
           <p:nvPr/>
         </p:nvPicPr>
         <p:blipFill>
-          <a:blip r:embed="rId2"/>
+          <a:blip r:embed="rId3"/>
           <a:stretch>
             <a:fillRect/>
           </a:stretch>
@@ -7610,6 +7522,13 @@
           </a:solidFill>
           <a:ln/>
         </p:spPr>
+        <p:txBody>
+          <a:bodyPr/>
+          <a:lstStyle/>
+          <a:p>
+            <a:endParaRPr lang="en-US"/>
+          </a:p>
+        </p:txBody>
       </p:sp>
       <p:sp>
         <p:nvSpPr>
@@ -7632,7 +7551,7 @@
           <a:bodyPr wrap="square" lIns="0" tIns="0" rIns="0" bIns="0" rtlCol="0" anchor="ctr"/>
           <a:lstStyle/>
           <a:p>
-            <a:pPr algn="ctr" indent="0" marL="0">
+            <a:pPr marL="0" indent="0" algn="ctr">
               <a:buNone/>
             </a:pPr>
             <a:r>
@@ -7674,6 +7593,13 @@
             <a:prstDash val="solid"/>
           </a:ln>
         </p:spPr>
+        <p:txBody>
+          <a:bodyPr/>
+          <a:lstStyle/>
+          <a:p>
+            <a:endParaRPr lang="en-US"/>
+          </a:p>
+        </p:txBody>
       </p:sp>
       <p:sp>
         <p:nvSpPr>
@@ -7802,7 +7728,7 @@
           <a:bodyPr wrap="square" lIns="0" tIns="0" rIns="0" bIns="0" rtlCol="0" anchor="ctr"/>
           <a:lstStyle/>
           <a:p>
-            <a:pPr indent="0" marL="0">
+            <a:pPr marL="0" indent="0">
               <a:buNone/>
             </a:pPr>
             <a:r>
@@ -7841,7 +7767,7 @@
           <a:bodyPr wrap="square" lIns="0" tIns="0" rIns="0" bIns="0" rtlCol="0" anchor="ctr"/>
           <a:lstStyle/>
           <a:p>
-            <a:pPr algn="r" indent="0" marL="0">
+            <a:pPr marL="0" indent="0" algn="r">
               <a:buNone/>
             </a:pPr>
             <a:r>
@@ -7875,6 +7801,7 @@
         <a:solidFill>
           <a:srgbClr val="FFFFFF"/>
         </a:solidFill>
+        <a:effectLst/>
       </p:bgPr>
     </p:bg>
     <p:spTree>
@@ -7912,7 +7839,7 @@
           <a:bodyPr wrap="square" lIns="0" tIns="0" rIns="0" bIns="0" rtlCol="0" anchor="ctr"/>
           <a:lstStyle/>
           <a:p>
-            <a:pPr indent="0" marL="0">
+            <a:pPr marL="0" indent="0">
               <a:buNone/>
             </a:pPr>
             <a:r>
@@ -7951,7 +7878,7 @@
           <a:bodyPr wrap="square" lIns="0" tIns="0" rIns="0" bIns="0" rtlCol="0" anchor="ctr"/>
           <a:lstStyle/>
           <a:p>
-            <a:pPr indent="0" marL="0">
+            <a:pPr marL="0" indent="0">
               <a:buNone/>
             </a:pPr>
             <a:r>
@@ -7988,6 +7915,13 @@
           </a:solidFill>
           <a:ln/>
         </p:spPr>
+        <p:txBody>
+          <a:bodyPr/>
+          <a:lstStyle/>
+          <a:p>
+            <a:endParaRPr lang="en-US"/>
+          </a:p>
+        </p:txBody>
       </p:sp>
       <p:sp>
         <p:nvSpPr>
@@ -8010,7 +7944,7 @@
           <a:bodyPr wrap="square" lIns="0" tIns="0" rIns="0" bIns="0" rtlCol="0" anchor="ctr"/>
           <a:lstStyle/>
           <a:p>
-            <a:pPr indent="0" marL="0">
+            <a:pPr marL="0" indent="0">
               <a:buNone/>
             </a:pPr>
             <a:r>
@@ -8049,7 +7983,7 @@
           <a:bodyPr wrap="square" lIns="0" tIns="0" rIns="0" bIns="0" rtlCol="0" anchor="ctr"/>
           <a:lstStyle/>
           <a:p>
-            <a:pPr indent="0" marL="0">
+            <a:pPr marL="0" indent="0">
               <a:buNone/>
             </a:pPr>
             <a:r>
@@ -8086,6 +8020,13 @@
           </a:solidFill>
           <a:ln/>
         </p:spPr>
+        <p:txBody>
+          <a:bodyPr/>
+          <a:lstStyle/>
+          <a:p>
+            <a:endParaRPr lang="en-US"/>
+          </a:p>
+        </p:txBody>
       </p:sp>
       <p:sp>
         <p:nvSpPr>
@@ -8108,7 +8049,7 @@
           <a:bodyPr wrap="square" lIns="0" tIns="0" rIns="0" bIns="0" rtlCol="0" anchor="ctr"/>
           <a:lstStyle/>
           <a:p>
-            <a:pPr indent="0" marL="0">
+            <a:pPr marL="0" indent="0">
               <a:buNone/>
             </a:pPr>
             <a:r>
@@ -8147,7 +8088,7 @@
           <a:bodyPr wrap="square" lIns="0" tIns="0" rIns="0" bIns="0" rtlCol="0" anchor="ctr"/>
           <a:lstStyle/>
           <a:p>
-            <a:pPr indent="0" marL="0">
+            <a:pPr marL="0" indent="0">
               <a:buNone/>
             </a:pPr>
             <a:r>
@@ -8186,7 +8127,7 @@
           <a:bodyPr wrap="square" lIns="0" tIns="0" rIns="0" bIns="0" rtlCol="0" anchor="ctr"/>
           <a:lstStyle/>
           <a:p>
-            <a:pPr indent="0" marL="0">
+            <a:pPr marL="0" indent="0">
               <a:buNone/>
             </a:pPr>
             <a:r>
@@ -8225,7 +8166,7 @@
           <a:bodyPr wrap="square" lIns="0" tIns="0" rIns="0" bIns="0" rtlCol="0" anchor="ctr"/>
           <a:lstStyle/>
           <a:p>
-            <a:pPr indent="0" marL="0">
+            <a:pPr marL="0" indent="0">
               <a:buNone/>
             </a:pPr>
             <a:r>
@@ -8262,6 +8203,13 @@
           </a:solidFill>
           <a:ln/>
         </p:spPr>
+        <p:txBody>
+          <a:bodyPr/>
+          <a:lstStyle/>
+          <a:p>
+            <a:endParaRPr lang="en-US"/>
+          </a:p>
+        </p:txBody>
       </p:sp>
       <p:sp>
         <p:nvSpPr>
@@ -8284,7 +8232,7 @@
           <a:bodyPr wrap="square" lIns="0" tIns="0" rIns="0" bIns="0" rtlCol="0" anchor="ctr"/>
           <a:lstStyle/>
           <a:p>
-            <a:pPr indent="0" marL="0">
+            <a:pPr marL="0" indent="0">
               <a:buNone/>
             </a:pPr>
             <a:r>
@@ -8323,7 +8271,7 @@
           <a:bodyPr wrap="square" lIns="0" tIns="0" rIns="0" bIns="0" rtlCol="0" anchor="ctr"/>
           <a:lstStyle/>
           <a:p>
-            <a:pPr indent="0" marL="0">
+            <a:pPr marL="0" indent="0">
               <a:buNone/>
             </a:pPr>
             <a:r>
@@ -8362,7 +8310,7 @@
           <a:bodyPr wrap="square" lIns="0" tIns="0" rIns="0" bIns="0" rtlCol="0" anchor="ctr"/>
           <a:lstStyle/>
           <a:p>
-            <a:pPr indent="0" marL="0">
+            <a:pPr marL="0" indent="0">
               <a:buNone/>
             </a:pPr>
             <a:r>
@@ -8401,7 +8349,7 @@
           <a:bodyPr wrap="square" lIns="0" tIns="0" rIns="0" bIns="0" rtlCol="0" anchor="ctr"/>
           <a:lstStyle/>
           <a:p>
-            <a:pPr indent="0" marL="0">
+            <a:pPr marL="0" indent="0">
               <a:buNone/>
             </a:pPr>
             <a:r>
@@ -8438,6 +8386,13 @@
           </a:solidFill>
           <a:ln/>
         </p:spPr>
+        <p:txBody>
+          <a:bodyPr/>
+          <a:lstStyle/>
+          <a:p>
+            <a:endParaRPr lang="en-US"/>
+          </a:p>
+        </p:txBody>
       </p:sp>
       <p:sp>
         <p:nvSpPr>
@@ -8460,7 +8415,7 @@
           <a:bodyPr wrap="square" lIns="0" tIns="0" rIns="0" bIns="0" rtlCol="0" anchor="ctr"/>
           <a:lstStyle/>
           <a:p>
-            <a:pPr indent="0" marL="0">
+            <a:pPr marL="0" indent="0">
               <a:buNone/>
             </a:pPr>
             <a:r>
@@ -8499,7 +8454,7 @@
           <a:bodyPr wrap="square" lIns="0" tIns="0" rIns="0" bIns="0" rtlCol="0" anchor="ctr"/>
           <a:lstStyle/>
           <a:p>
-            <a:pPr indent="0" marL="0">
+            <a:pPr marL="0" indent="0">
               <a:buNone/>
             </a:pPr>
             <a:r>
@@ -8538,7 +8493,7 @@
           <a:bodyPr wrap="square" lIns="0" tIns="0" rIns="0" bIns="0" rtlCol="0" anchor="ctr"/>
           <a:lstStyle/>
           <a:p>
-            <a:pPr indent="0" marL="0">
+            <a:pPr marL="0" indent="0">
               <a:buNone/>
             </a:pPr>
             <a:r>
@@ -8577,7 +8532,7 @@
           <a:bodyPr wrap="square" lIns="0" tIns="0" rIns="0" bIns="0" rtlCol="0" anchor="ctr"/>
           <a:lstStyle/>
           <a:p>
-            <a:pPr indent="0" marL="0">
+            <a:pPr marL="0" indent="0">
               <a:buNone/>
             </a:pPr>
             <a:r>
@@ -8616,7 +8571,7 @@
           <a:bodyPr wrap="square" lIns="0" tIns="0" rIns="0" bIns="0" rtlCol="0" anchor="ctr"/>
           <a:lstStyle/>
           <a:p>
-            <a:pPr indent="0" marL="0">
+            <a:pPr marL="0" indent="0">
               <a:buNone/>
             </a:pPr>
             <a:r>
@@ -8655,7 +8610,7 @@
           <a:bodyPr wrap="square" lIns="0" tIns="0" rIns="0" bIns="0" rtlCol="0" anchor="ctr"/>
           <a:lstStyle/>
           <a:p>
-            <a:pPr algn="r" indent="0" marL="0">
+            <a:pPr marL="0" indent="0" algn="r">
               <a:buNone/>
             </a:pPr>
             <a:r>
@@ -8689,6 +8644,7 @@
         <a:solidFill>
           <a:srgbClr val="FFFFFF"/>
         </a:solidFill>
+        <a:effectLst/>
       </p:bgPr>
     </p:bg>
     <p:spTree>
@@ -8726,7 +8682,7 @@
           <a:bodyPr wrap="square" lIns="0" tIns="0" rIns="0" bIns="0" rtlCol="0" anchor="ctr"/>
           <a:lstStyle/>
           <a:p>
-            <a:pPr indent="0" marL="0">
+            <a:pPr marL="0" indent="0">
               <a:buNone/>
             </a:pPr>
             <a:r>
@@ -8765,7 +8721,7 @@
           <a:bodyPr wrap="square" lIns="0" tIns="0" rIns="0" bIns="0" rtlCol="0" anchor="ctr"/>
           <a:lstStyle/>
           <a:p>
-            <a:pPr indent="0" marL="0">
+            <a:pPr marL="0" indent="0">
               <a:buNone/>
             </a:pPr>
             <a:r>
@@ -8804,7 +8760,7 @@
           <a:bodyPr wrap="square" lIns="0" tIns="0" rIns="0" bIns="0" rtlCol="0" anchor="ctr"/>
           <a:lstStyle/>
           <a:p>
-            <a:pPr indent="0" marL="0">
+            <a:pPr marL="0" indent="0">
               <a:buNone/>
             </a:pPr>
             <a:r>
@@ -8843,7 +8799,7 @@
           <a:bodyPr wrap="square" lIns="0" tIns="0" rIns="0" bIns="0" rtlCol="0" anchor="ctr"/>
           <a:lstStyle/>
           <a:p>
-            <a:pPr indent="0" marL="0">
+            <a:pPr marL="0" indent="0">
               <a:buNone/>
             </a:pPr>
             <a:r>
@@ -8882,7 +8838,7 @@
           <a:bodyPr wrap="square" lIns="0" tIns="0" rIns="0" bIns="0" rtlCol="0" anchor="ctr"/>
           <a:lstStyle/>
           <a:p>
-            <a:pPr indent="0" marL="0">
+            <a:pPr marL="0" indent="0">
               <a:buNone/>
             </a:pPr>
             <a:r>
@@ -8921,7 +8877,7 @@
           <a:bodyPr wrap="square" lIns="0" tIns="0" rIns="0" bIns="0" rtlCol="0" anchor="ctr"/>
           <a:lstStyle/>
           <a:p>
-            <a:pPr indent="0" marL="0">
+            <a:pPr marL="0" indent="0">
               <a:buNone/>
             </a:pPr>
             <a:r>
@@ -8960,7 +8916,7 @@
           <a:bodyPr wrap="square" lIns="0" tIns="0" rIns="0" bIns="0" rtlCol="0" anchor="ctr"/>
           <a:lstStyle/>
           <a:p>
-            <a:pPr indent="0" marL="0">
+            <a:pPr marL="0" indent="0">
               <a:buNone/>
             </a:pPr>
             <a:r>
@@ -8999,7 +8955,7 @@
           <a:bodyPr wrap="square" lIns="0" tIns="0" rIns="0" bIns="0" rtlCol="0" anchor="ctr"/>
           <a:lstStyle/>
           <a:p>
-            <a:pPr indent="0" marL="0">
+            <a:pPr marL="0" indent="0">
               <a:buNone/>
             </a:pPr>
             <a:r>
@@ -9038,7 +8994,7 @@
           <a:bodyPr wrap="square" lIns="0" tIns="0" rIns="0" bIns="0" rtlCol="0" anchor="ctr"/>
           <a:lstStyle/>
           <a:p>
-            <a:pPr indent="0" marL="0">
+            <a:pPr marL="0" indent="0">
               <a:buNone/>
             </a:pPr>
             <a:r>
@@ -9077,7 +9033,7 @@
           <a:bodyPr wrap="square" lIns="0" tIns="0" rIns="0" bIns="0" rtlCol="0" anchor="ctr"/>
           <a:lstStyle/>
           <a:p>
-            <a:pPr indent="0" marL="0">
+            <a:pPr marL="0" indent="0">
               <a:buNone/>
             </a:pPr>
             <a:r>
@@ -9116,7 +9072,7 @@
           <a:bodyPr wrap="square" lIns="0" tIns="0" rIns="0" bIns="0" rtlCol="0" anchor="ctr"/>
           <a:lstStyle/>
           <a:p>
-            <a:pPr indent="0" marL="0">
+            <a:pPr marL="0" indent="0">
               <a:buNone/>
             </a:pPr>
             <a:r>
@@ -9153,6 +9109,13 @@
           </a:solidFill>
           <a:ln/>
         </p:spPr>
+        <p:txBody>
+          <a:bodyPr/>
+          <a:lstStyle/>
+          <a:p>
+            <a:endParaRPr lang="en-US"/>
+          </a:p>
+        </p:txBody>
       </p:sp>
       <p:sp>
         <p:nvSpPr>
@@ -9175,7 +9138,7 @@
           <a:bodyPr wrap="square" lIns="0" tIns="0" rIns="0" bIns="0" rtlCol="0" anchor="ctr"/>
           <a:lstStyle/>
           <a:p>
-            <a:pPr indent="0" marL="0">
+            <a:pPr marL="0" indent="0">
               <a:buNone/>
             </a:pPr>
             <a:r>
@@ -9212,6 +9175,13 @@
           </a:solidFill>
           <a:ln/>
         </p:spPr>
+        <p:txBody>
+          <a:bodyPr/>
+          <a:lstStyle/>
+          <a:p>
+            <a:endParaRPr lang="en-US"/>
+          </a:p>
+        </p:txBody>
       </p:sp>
       <p:sp>
         <p:nvSpPr>
@@ -9234,7 +9204,7 @@
           <a:bodyPr wrap="square" lIns="0" tIns="0" rIns="0" bIns="0" rtlCol="0" anchor="ctr"/>
           <a:lstStyle/>
           <a:p>
-            <a:pPr indent="0" marL="0">
+            <a:pPr marL="0" indent="0">
               <a:buNone/>
             </a:pPr>
             <a:r>
@@ -9273,7 +9243,7 @@
           <a:bodyPr wrap="square" lIns="0" tIns="0" rIns="0" bIns="0" rtlCol="0" anchor="ctr"/>
           <a:lstStyle/>
           <a:p>
-            <a:pPr indent="0" marL="0">
+            <a:pPr marL="0" indent="0">
               <a:buNone/>
             </a:pPr>
             <a:r>
@@ -9310,6 +9280,13 @@
           </a:solidFill>
           <a:ln/>
         </p:spPr>
+        <p:txBody>
+          <a:bodyPr/>
+          <a:lstStyle/>
+          <a:p>
+            <a:endParaRPr lang="en-US"/>
+          </a:p>
+        </p:txBody>
       </p:sp>
       <p:sp>
         <p:nvSpPr>
@@ -9332,7 +9309,7 @@
           <a:bodyPr wrap="square" lIns="0" tIns="0" rIns="0" bIns="0" rtlCol="0" anchor="ctr"/>
           <a:lstStyle/>
           <a:p>
-            <a:pPr indent="0" marL="0">
+            <a:pPr marL="0" indent="0">
               <a:buNone/>
             </a:pPr>
             <a:r>
@@ -9371,7 +9348,7 @@
           <a:bodyPr wrap="square" lIns="0" tIns="0" rIns="0" bIns="0" rtlCol="0" anchor="ctr"/>
           <a:lstStyle/>
           <a:p>
-            <a:pPr indent="0" marL="0">
+            <a:pPr marL="0" indent="0">
               <a:buNone/>
             </a:pPr>
             <a:r>
@@ -9408,6 +9385,13 @@
           </a:solidFill>
           <a:ln/>
         </p:spPr>
+        <p:txBody>
+          <a:bodyPr/>
+          <a:lstStyle/>
+          <a:p>
+            <a:endParaRPr lang="en-US"/>
+          </a:p>
+        </p:txBody>
       </p:sp>
       <p:sp>
         <p:nvSpPr>
@@ -9430,7 +9414,7 @@
           <a:bodyPr wrap="square" lIns="0" tIns="0" rIns="0" bIns="0" rtlCol="0" anchor="ctr"/>
           <a:lstStyle/>
           <a:p>
-            <a:pPr indent="0" marL="0">
+            <a:pPr marL="0" indent="0">
               <a:buNone/>
             </a:pPr>
             <a:r>
@@ -9469,7 +9453,7 @@
           <a:bodyPr wrap="square" lIns="0" tIns="0" rIns="0" bIns="0" rtlCol="0" anchor="ctr"/>
           <a:lstStyle/>
           <a:p>
-            <a:pPr indent="0" marL="0">
+            <a:pPr marL="0" indent="0">
               <a:buNone/>
             </a:pPr>
             <a:r>
@@ -9508,7 +9492,7 @@
           <a:bodyPr wrap="square" lIns="0" tIns="0" rIns="0" bIns="0" rtlCol="0" anchor="ctr"/>
           <a:lstStyle/>
           <a:p>
-            <a:pPr indent="0" marL="0">
+            <a:pPr marL="0" indent="0">
               <a:buNone/>
             </a:pPr>
             <a:r>
@@ -9547,7 +9531,7 @@
           <a:bodyPr wrap="square" lIns="0" tIns="0" rIns="0" bIns="0" rtlCol="0" anchor="ctr"/>
           <a:lstStyle/>
           <a:p>
-            <a:pPr algn="r" indent="0" marL="0">
+            <a:pPr marL="0" indent="0" algn="r">
               <a:buNone/>
             </a:pPr>
             <a:r>
@@ -9581,6 +9565,7 @@
         <a:solidFill>
           <a:srgbClr val="FFFFFF"/>
         </a:solidFill>
+        <a:effectLst/>
       </p:bgPr>
     </p:bg>
     <p:spTree>
@@ -9618,7 +9603,7 @@
           <a:bodyPr wrap="square" lIns="0" tIns="0" rIns="0" bIns="0" rtlCol="0" anchor="ctr"/>
           <a:lstStyle/>
           <a:p>
-            <a:pPr indent="0" marL="0">
+            <a:pPr marL="0" indent="0">
               <a:buNone/>
             </a:pPr>
             <a:r>
@@ -9657,7 +9642,7 @@
           <a:bodyPr wrap="square" lIns="0" tIns="0" rIns="0" bIns="0" rtlCol="0" anchor="ctr"/>
           <a:lstStyle/>
           <a:p>
-            <a:pPr indent="0" marL="0">
+            <a:pPr marL="0" indent="0">
               <a:buNone/>
             </a:pPr>
             <a:r>
@@ -9691,15 +9676,27 @@
         </p:nvGraphicFramePr>
         <p:xfrm>
           <a:off x="457200" y="1417320"/>
-          <a:ext cx="8229600" cy="914400"/>
+          <a:ext cx="8229600" cy="2926080"/>
         </p:xfrm>
         <a:graphic>
           <a:graphicData uri="http://schemas.openxmlformats.org/drawingml/2006/table">
             <a:tbl>
               <a:tblPr/>
               <a:tblGrid>
-                <a:gridCol w="6217920"/>
-                <a:gridCol w="2011680"/>
+                <a:gridCol w="6217920">
+                  <a:extLst>
+                    <a:ext uri="{9D8B030D-6E8A-4147-A177-3AD203B41FA5}">
+                      <a16:colId xmlns:a16="http://schemas.microsoft.com/office/drawing/2014/main" val="20000"/>
+                    </a:ext>
+                  </a:extLst>
+                </a:gridCol>
+                <a:gridCol w="2011680">
+                  <a:extLst>
+                    <a:ext uri="{9D8B030D-6E8A-4147-A177-3AD203B41FA5}">
+                      <a16:colId xmlns:a16="http://schemas.microsoft.com/office/drawing/2014/main" val="20001"/>
+                    </a:ext>
+                  </a:extLst>
+                </a:gridCol>
               </a:tblGrid>
               <a:tr h="292608">
                 <a:tc>
@@ -9707,7 +9704,7 @@
                     <a:bodyPr/>
                     <a:lstStyle/>
                     <a:p>
-                      <a:pPr algn="l" indent="0" marL="0">
+                      <a:pPr marL="0" indent="0" algn="l">
                         <a:buNone/>
                       </a:pPr>
                       <a:r>
@@ -9728,7 +9725,7 @@
                       </a:endParaRPr>
                     </a:p>
                   </a:txBody>
-                  <a:tcPr marL="91440" marR="91440" marT="45720" marB="45720" anchor="ctr">
+                  <a:tcPr anchor="ctr">
                     <a:lnL w="6350" cap="flat" cmpd="sng" algn="ctr">
                       <a:solidFill>
                         <a:srgbClr val="D9DEE8"/>
@@ -9775,7 +9772,7 @@
                     <a:bodyPr/>
                     <a:lstStyle/>
                     <a:p>
-                      <a:pPr algn="ctr" indent="0" marL="0">
+                      <a:pPr marL="0" indent="0" algn="ctr">
                         <a:buNone/>
                       </a:pPr>
                       <a:r>
@@ -9796,7 +9793,7 @@
                       </a:endParaRPr>
                     </a:p>
                   </a:txBody>
-                  <a:tcPr marL="91440" marR="91440" marT="45720" marB="45720" anchor="ctr">
+                  <a:tcPr anchor="ctr">
                     <a:lnL w="6350" cap="flat" cmpd="sng" algn="ctr">
                       <a:solidFill>
                         <a:srgbClr val="D9DEE8"/>
@@ -9838,6 +9835,11 @@
                     </a:solidFill>
                   </a:tcPr>
                 </a:tc>
+                <a:extLst>
+                  <a:ext uri="{0D108BD9-81ED-4DB2-BD59-A6C34878D82A}">
+                    <a16:rowId xmlns:a16="http://schemas.microsoft.com/office/drawing/2014/main" val="10000"/>
+                  </a:ext>
+                </a:extLst>
               </a:tr>
               <a:tr h="292608">
                 <a:tc>
@@ -9845,7 +9847,7 @@
                     <a:bodyPr/>
                     <a:lstStyle/>
                     <a:p>
-                      <a:pPr indent="0" marL="0">
+                      <a:pPr marL="0" indent="0">
                         <a:buNone/>
                       </a:pPr>
                       <a:r>
@@ -9866,7 +9868,7 @@
                       </a:endParaRPr>
                     </a:p>
                   </a:txBody>
-                  <a:tcPr marL="91440" marR="91440" marT="45720" marB="45720" anchor="ctr">
+                  <a:tcPr anchor="ctr">
                     <a:lnL w="6350" cap="flat" cmpd="sng" algn="ctr">
                       <a:solidFill>
                         <a:srgbClr val="D9DEE8"/>
@@ -9910,7 +9912,7 @@
                     <a:bodyPr/>
                     <a:lstStyle/>
                     <a:p>
-                      <a:pPr algn="ctr" indent="0" marL="0">
+                      <a:pPr marL="0" indent="0" algn="ctr">
                         <a:buNone/>
                       </a:pPr>
                       <a:r>
@@ -9931,7 +9933,7 @@
                       </a:endParaRPr>
                     </a:p>
                   </a:txBody>
-                  <a:tcPr marL="91440" marR="91440" marT="45720" marB="45720" anchor="ctr">
+                  <a:tcPr anchor="ctr">
                     <a:lnL w="6350" cap="flat" cmpd="sng" algn="ctr">
                       <a:solidFill>
                         <a:srgbClr val="D9DEE8"/>
@@ -9970,6 +9972,11 @@
                     </a:lnB>
                   </a:tcPr>
                 </a:tc>
+                <a:extLst>
+                  <a:ext uri="{0D108BD9-81ED-4DB2-BD59-A6C34878D82A}">
+                    <a16:rowId xmlns:a16="http://schemas.microsoft.com/office/drawing/2014/main" val="10001"/>
+                  </a:ext>
+                </a:extLst>
               </a:tr>
               <a:tr h="292608">
                 <a:tc>
@@ -9977,7 +9984,7 @@
                     <a:bodyPr/>
                     <a:lstStyle/>
                     <a:p>
-                      <a:pPr indent="0" marL="0">
+                      <a:pPr marL="0" indent="0">
                         <a:buNone/>
                       </a:pPr>
                       <a:r>
@@ -9998,7 +10005,7 @@
                       </a:endParaRPr>
                     </a:p>
                   </a:txBody>
-                  <a:tcPr marL="91440" marR="91440" marT="45720" marB="45720" anchor="ctr">
+                  <a:tcPr anchor="ctr">
                     <a:lnL w="6350" cap="flat" cmpd="sng" algn="ctr">
                       <a:solidFill>
                         <a:srgbClr val="D9DEE8"/>
@@ -10042,7 +10049,7 @@
                     <a:bodyPr/>
                     <a:lstStyle/>
                     <a:p>
-                      <a:pPr algn="ctr" indent="0" marL="0">
+                      <a:pPr marL="0" indent="0" algn="ctr">
                         <a:buNone/>
                       </a:pPr>
                       <a:r>
@@ -10063,7 +10070,7 @@
                       </a:endParaRPr>
                     </a:p>
                   </a:txBody>
-                  <a:tcPr marL="91440" marR="91440" marT="45720" marB="45720" anchor="ctr">
+                  <a:tcPr anchor="ctr">
                     <a:lnL w="6350" cap="flat" cmpd="sng" algn="ctr">
                       <a:solidFill>
                         <a:srgbClr val="D9DEE8"/>
@@ -10102,6 +10109,11 @@
                     </a:lnB>
                   </a:tcPr>
                 </a:tc>
+                <a:extLst>
+                  <a:ext uri="{0D108BD9-81ED-4DB2-BD59-A6C34878D82A}">
+                    <a16:rowId xmlns:a16="http://schemas.microsoft.com/office/drawing/2014/main" val="10002"/>
+                  </a:ext>
+                </a:extLst>
               </a:tr>
               <a:tr h="292608">
                 <a:tc>
@@ -10109,7 +10121,7 @@
                     <a:bodyPr/>
                     <a:lstStyle/>
                     <a:p>
-                      <a:pPr indent="0" marL="0">
+                      <a:pPr marL="0" indent="0">
                         <a:buNone/>
                       </a:pPr>
                       <a:r>
@@ -10130,7 +10142,7 @@
                       </a:endParaRPr>
                     </a:p>
                   </a:txBody>
-                  <a:tcPr marL="91440" marR="91440" marT="45720" marB="45720" anchor="ctr">
+                  <a:tcPr anchor="ctr">
                     <a:lnL w="6350" cap="flat" cmpd="sng" algn="ctr">
                       <a:solidFill>
                         <a:srgbClr val="D9DEE8"/>
@@ -10174,7 +10186,7 @@
                     <a:bodyPr/>
                     <a:lstStyle/>
                     <a:p>
-                      <a:pPr algn="ctr" indent="0" marL="0">
+                      <a:pPr marL="0" indent="0" algn="ctr">
                         <a:buNone/>
                       </a:pPr>
                       <a:r>
@@ -10195,7 +10207,7 @@
                       </a:endParaRPr>
                     </a:p>
                   </a:txBody>
-                  <a:tcPr marL="91440" marR="91440" marT="45720" marB="45720" anchor="ctr">
+                  <a:tcPr anchor="ctr">
                     <a:lnL w="6350" cap="flat" cmpd="sng" algn="ctr">
                       <a:solidFill>
                         <a:srgbClr val="D9DEE8"/>
@@ -10234,6 +10246,11 @@
                     </a:lnB>
                   </a:tcPr>
                 </a:tc>
+                <a:extLst>
+                  <a:ext uri="{0D108BD9-81ED-4DB2-BD59-A6C34878D82A}">
+                    <a16:rowId xmlns:a16="http://schemas.microsoft.com/office/drawing/2014/main" val="10003"/>
+                  </a:ext>
+                </a:extLst>
               </a:tr>
               <a:tr h="292608">
                 <a:tc>
@@ -10241,7 +10258,7 @@
                     <a:bodyPr/>
                     <a:lstStyle/>
                     <a:p>
-                      <a:pPr indent="0" marL="0">
+                      <a:pPr marL="0" indent="0">
                         <a:buNone/>
                       </a:pPr>
                       <a:r>
@@ -10262,7 +10279,7 @@
                       </a:endParaRPr>
                     </a:p>
                   </a:txBody>
-                  <a:tcPr marL="91440" marR="91440" marT="45720" marB="45720" anchor="ctr">
+                  <a:tcPr anchor="ctr">
                     <a:lnL w="6350" cap="flat" cmpd="sng" algn="ctr">
                       <a:solidFill>
                         <a:srgbClr val="D9DEE8"/>
@@ -10306,7 +10323,7 @@
                     <a:bodyPr/>
                     <a:lstStyle/>
                     <a:p>
-                      <a:pPr algn="ctr" indent="0" marL="0">
+                      <a:pPr marL="0" indent="0" algn="ctr">
                         <a:buNone/>
                       </a:pPr>
                       <a:r>
@@ -10327,7 +10344,7 @@
                       </a:endParaRPr>
                     </a:p>
                   </a:txBody>
-                  <a:tcPr marL="91440" marR="91440" marT="45720" marB="45720" anchor="ctr">
+                  <a:tcPr anchor="ctr">
                     <a:lnL w="6350" cap="flat" cmpd="sng" algn="ctr">
                       <a:solidFill>
                         <a:srgbClr val="D9DEE8"/>
@@ -10366,6 +10383,11 @@
                     </a:lnB>
                   </a:tcPr>
                 </a:tc>
+                <a:extLst>
+                  <a:ext uri="{0D108BD9-81ED-4DB2-BD59-A6C34878D82A}">
+                    <a16:rowId xmlns:a16="http://schemas.microsoft.com/office/drawing/2014/main" val="10004"/>
+                  </a:ext>
+                </a:extLst>
               </a:tr>
               <a:tr h="292608">
                 <a:tc>
@@ -10373,7 +10395,7 @@
                     <a:bodyPr/>
                     <a:lstStyle/>
                     <a:p>
-                      <a:pPr indent="0" marL="0">
+                      <a:pPr marL="0" indent="0">
                         <a:buNone/>
                       </a:pPr>
                       <a:r>
@@ -10394,7 +10416,7 @@
                       </a:endParaRPr>
                     </a:p>
                   </a:txBody>
-                  <a:tcPr marL="91440" marR="91440" marT="45720" marB="45720" anchor="ctr">
+                  <a:tcPr anchor="ctr">
                     <a:lnL w="6350" cap="flat" cmpd="sng" algn="ctr">
                       <a:solidFill>
                         <a:srgbClr val="D9DEE8"/>
@@ -10438,7 +10460,7 @@
                     <a:bodyPr/>
                     <a:lstStyle/>
                     <a:p>
-                      <a:pPr algn="ctr" indent="0" marL="0">
+                      <a:pPr marL="0" indent="0" algn="ctr">
                         <a:buNone/>
                       </a:pPr>
                       <a:r>
@@ -10459,7 +10481,7 @@
                       </a:endParaRPr>
                     </a:p>
                   </a:txBody>
-                  <a:tcPr marL="91440" marR="91440" marT="45720" marB="45720" anchor="ctr">
+                  <a:tcPr anchor="ctr">
                     <a:lnL w="6350" cap="flat" cmpd="sng" algn="ctr">
                       <a:solidFill>
                         <a:srgbClr val="D9DEE8"/>
@@ -10498,6 +10520,11 @@
                     </a:lnB>
                   </a:tcPr>
                 </a:tc>
+                <a:extLst>
+                  <a:ext uri="{0D108BD9-81ED-4DB2-BD59-A6C34878D82A}">
+                    <a16:rowId xmlns:a16="http://schemas.microsoft.com/office/drawing/2014/main" val="10005"/>
+                  </a:ext>
+                </a:extLst>
               </a:tr>
               <a:tr h="292608">
                 <a:tc>
@@ -10505,7 +10532,7 @@
                     <a:bodyPr/>
                     <a:lstStyle/>
                     <a:p>
-                      <a:pPr indent="0" marL="0">
+                      <a:pPr marL="0" indent="0">
                         <a:buNone/>
                       </a:pPr>
                       <a:r>
@@ -10526,7 +10553,7 @@
                       </a:endParaRPr>
                     </a:p>
                   </a:txBody>
-                  <a:tcPr marL="91440" marR="91440" marT="45720" marB="45720" anchor="ctr">
+                  <a:tcPr anchor="ctr">
                     <a:lnL w="6350" cap="flat" cmpd="sng" algn="ctr">
                       <a:solidFill>
                         <a:srgbClr val="D9DEE8"/>
@@ -10570,7 +10597,7 @@
                     <a:bodyPr/>
                     <a:lstStyle/>
                     <a:p>
-                      <a:pPr algn="ctr" indent="0" marL="0">
+                      <a:pPr marL="0" indent="0" algn="ctr">
                         <a:buNone/>
                       </a:pPr>
                       <a:r>
@@ -10591,7 +10618,7 @@
                       </a:endParaRPr>
                     </a:p>
                   </a:txBody>
-                  <a:tcPr marL="91440" marR="91440" marT="45720" marB="45720" anchor="ctr">
+                  <a:tcPr anchor="ctr">
                     <a:lnL w="6350" cap="flat" cmpd="sng" algn="ctr">
                       <a:solidFill>
                         <a:srgbClr val="D9DEE8"/>
@@ -10630,6 +10657,11 @@
                     </a:lnB>
                   </a:tcPr>
                 </a:tc>
+                <a:extLst>
+                  <a:ext uri="{0D108BD9-81ED-4DB2-BD59-A6C34878D82A}">
+                    <a16:rowId xmlns:a16="http://schemas.microsoft.com/office/drawing/2014/main" val="10006"/>
+                  </a:ext>
+                </a:extLst>
               </a:tr>
               <a:tr h="292608">
                 <a:tc>
@@ -10637,7 +10669,7 @@
                     <a:bodyPr/>
                     <a:lstStyle/>
                     <a:p>
-                      <a:pPr indent="0" marL="0">
+                      <a:pPr marL="0" indent="0">
                         <a:buNone/>
                       </a:pPr>
                       <a:r>
@@ -10658,7 +10690,7 @@
                       </a:endParaRPr>
                     </a:p>
                   </a:txBody>
-                  <a:tcPr marL="91440" marR="91440" marT="45720" marB="45720" anchor="ctr">
+                  <a:tcPr anchor="ctr">
                     <a:lnL w="6350" cap="flat" cmpd="sng" algn="ctr">
                       <a:solidFill>
                         <a:srgbClr val="D9DEE8"/>
@@ -10702,7 +10734,7 @@
                     <a:bodyPr/>
                     <a:lstStyle/>
                     <a:p>
-                      <a:pPr algn="ctr" indent="0" marL="0">
+                      <a:pPr marL="0" indent="0" algn="ctr">
                         <a:buNone/>
                       </a:pPr>
                       <a:r>
@@ -10723,7 +10755,7 @@
                       </a:endParaRPr>
                     </a:p>
                   </a:txBody>
-                  <a:tcPr marL="91440" marR="91440" marT="45720" marB="45720" anchor="ctr">
+                  <a:tcPr anchor="ctr">
                     <a:lnL w="6350" cap="flat" cmpd="sng" algn="ctr">
                       <a:solidFill>
                         <a:srgbClr val="D9DEE8"/>
@@ -10762,6 +10794,11 @@
                     </a:lnB>
                   </a:tcPr>
                 </a:tc>
+                <a:extLst>
+                  <a:ext uri="{0D108BD9-81ED-4DB2-BD59-A6C34878D82A}">
+                    <a16:rowId xmlns:a16="http://schemas.microsoft.com/office/drawing/2014/main" val="10007"/>
+                  </a:ext>
+                </a:extLst>
               </a:tr>
               <a:tr h="292608">
                 <a:tc>
@@ -10769,7 +10806,7 @@
                     <a:bodyPr/>
                     <a:lstStyle/>
                     <a:p>
-                      <a:pPr indent="0" marL="0">
+                      <a:pPr marL="0" indent="0">
                         <a:buNone/>
                       </a:pPr>
                       <a:r>
@@ -10790,7 +10827,7 @@
                       </a:endParaRPr>
                     </a:p>
                   </a:txBody>
-                  <a:tcPr marL="91440" marR="91440" marT="45720" marB="45720" anchor="ctr">
+                  <a:tcPr anchor="ctr">
                     <a:lnL w="6350" cap="flat" cmpd="sng" algn="ctr">
                       <a:solidFill>
                         <a:srgbClr val="D9DEE8"/>
@@ -10834,7 +10871,7 @@
                     <a:bodyPr/>
                     <a:lstStyle/>
                     <a:p>
-                      <a:pPr algn="ctr" indent="0" marL="0">
+                      <a:pPr marL="0" indent="0" algn="ctr">
                         <a:buNone/>
                       </a:pPr>
                       <a:r>
@@ -10855,7 +10892,7 @@
                       </a:endParaRPr>
                     </a:p>
                   </a:txBody>
-                  <a:tcPr marL="91440" marR="91440" marT="45720" marB="45720" anchor="ctr">
+                  <a:tcPr anchor="ctr">
                     <a:lnL w="6350" cap="flat" cmpd="sng" algn="ctr">
                       <a:solidFill>
                         <a:srgbClr val="D9DEE8"/>
@@ -10894,6 +10931,11 @@
                     </a:lnB>
                   </a:tcPr>
                 </a:tc>
+                <a:extLst>
+                  <a:ext uri="{0D108BD9-81ED-4DB2-BD59-A6C34878D82A}">
+                    <a16:rowId xmlns:a16="http://schemas.microsoft.com/office/drawing/2014/main" val="10008"/>
+                  </a:ext>
+                </a:extLst>
               </a:tr>
               <a:tr h="292608">
                 <a:tc>
@@ -10901,7 +10943,7 @@
                     <a:bodyPr/>
                     <a:lstStyle/>
                     <a:p>
-                      <a:pPr indent="0" marL="0">
+                      <a:pPr marL="0" indent="0">
                         <a:buNone/>
                       </a:pPr>
                       <a:r>
@@ -10922,7 +10964,7 @@
                       </a:endParaRPr>
                     </a:p>
                   </a:txBody>
-                  <a:tcPr marL="91440" marR="91440" marT="45720" marB="45720" anchor="ctr">
+                  <a:tcPr anchor="ctr">
                     <a:lnL w="6350" cap="flat" cmpd="sng" algn="ctr">
                       <a:solidFill>
                         <a:srgbClr val="D9DEE8"/>
@@ -10966,7 +11008,7 @@
                     <a:bodyPr/>
                     <a:lstStyle/>
                     <a:p>
-                      <a:pPr algn="ctr" indent="0" marL="0">
+                      <a:pPr marL="0" indent="0" algn="ctr">
                         <a:buNone/>
                       </a:pPr>
                       <a:r>
@@ -10987,7 +11029,7 @@
                       </a:endParaRPr>
                     </a:p>
                   </a:txBody>
-                  <a:tcPr marL="91440" marR="91440" marT="45720" marB="45720" anchor="ctr">
+                  <a:tcPr anchor="ctr">
                     <a:lnL w="6350" cap="flat" cmpd="sng" algn="ctr">
                       <a:solidFill>
                         <a:srgbClr val="D9DEE8"/>
@@ -11026,6 +11068,11 @@
                     </a:lnB>
                   </a:tcPr>
                 </a:tc>
+                <a:extLst>
+                  <a:ext uri="{0D108BD9-81ED-4DB2-BD59-A6C34878D82A}">
+                    <a16:rowId xmlns:a16="http://schemas.microsoft.com/office/drawing/2014/main" val="10009"/>
+                  </a:ext>
+                </a:extLst>
               </a:tr>
             </a:tbl>
           </a:graphicData>
@@ -11050,6 +11097,13 @@
           </a:solidFill>
           <a:ln/>
         </p:spPr>
+        <p:txBody>
+          <a:bodyPr/>
+          <a:lstStyle/>
+          <a:p>
+            <a:endParaRPr lang="en-US"/>
+          </a:p>
+        </p:txBody>
       </p:sp>
       <p:sp>
         <p:nvSpPr>
@@ -11072,7 +11126,7 @@
           <a:bodyPr wrap="square" lIns="0" tIns="0" rIns="0" bIns="0" rtlCol="0" anchor="ctr"/>
           <a:lstStyle/>
           <a:p>
-            <a:pPr algn="ctr" indent="0" marL="0">
+            <a:pPr marL="0" indent="0" algn="ctr">
               <a:buNone/>
             </a:pPr>
             <a:r>
@@ -11086,9 +11140,6 @@
               </a:rPr>
               <a:t>Score ≥ 5 </a:t>
             </a:r>
-            <a:pPr algn="ctr" indent="0" marL="0">
-              <a:buNone/>
-            </a:pPr>
             <a:r>
               <a:rPr lang="en-US" sz="1100" dirty="0">
                 <a:solidFill>
@@ -11100,9 +11151,6 @@
               </a:rPr>
               <a:t>long-term  •  </a:t>
             </a:r>
-            <a:pPr algn="ctr" indent="0" marL="0">
-              <a:buNone/>
-            </a:pPr>
             <a:r>
               <a:rPr lang="en-US" sz="1100" b="1" dirty="0">
                 <a:solidFill>
@@ -11114,9 +11162,6 @@
               </a:rPr>
               <a:t>2–4 </a:t>
             </a:r>
-            <a:pPr algn="ctr" indent="0" marL="0">
-              <a:buNone/>
-            </a:pPr>
             <a:r>
               <a:rPr lang="en-US" sz="1100" dirty="0">
                 <a:solidFill>
@@ -11128,9 +11173,6 @@
               </a:rPr>
               <a:t>short-term  •  </a:t>
             </a:r>
-            <a:pPr algn="ctr" indent="0" marL="0">
-              <a:buNone/>
-            </a:pPr>
             <a:r>
               <a:rPr lang="en-US" sz="1100" b="1" dirty="0">
                 <a:solidFill>
@@ -11142,9 +11184,6 @@
               </a:rPr>
               <a:t>&lt; 2 </a:t>
             </a:r>
-            <a:pPr algn="ctr" indent="0" marL="0">
-              <a:buNone/>
-            </a:pPr>
             <a:r>
               <a:rPr lang="en-US" sz="1100" dirty="0">
                 <a:solidFill>
@@ -11181,7 +11220,7 @@
           <a:bodyPr wrap="square" lIns="0" tIns="0" rIns="0" bIns="0" rtlCol="0" anchor="ctr"/>
           <a:lstStyle/>
           <a:p>
-            <a:pPr indent="0" marL="0">
+            <a:pPr marL="0" indent="0">
               <a:buNone/>
             </a:pPr>
             <a:r>
@@ -11220,7 +11259,7 @@
           <a:bodyPr wrap="square" lIns="0" tIns="0" rIns="0" bIns="0" rtlCol="0" anchor="ctr"/>
           <a:lstStyle/>
           <a:p>
-            <a:pPr algn="r" indent="0" marL="0">
+            <a:pPr marL="0" indent="0" algn="r">
               <a:buNone/>
             </a:pPr>
             <a:r>
@@ -11254,6 +11293,7 @@
         <a:solidFill>
           <a:srgbClr val="FFFFFF"/>
         </a:solidFill>
+        <a:effectLst/>
       </p:bgPr>
     </p:bg>
     <p:spTree>
@@ -11291,7 +11331,7 @@
           <a:bodyPr wrap="square" lIns="0" tIns="0" rIns="0" bIns="0" rtlCol="0" anchor="ctr"/>
           <a:lstStyle/>
           <a:p>
-            <a:pPr indent="0" marL="0">
+            <a:pPr marL="0" indent="0">
               <a:buNone/>
             </a:pPr>
             <a:r>
@@ -11311,14 +11351,14 @@
       </p:sp>
       <p:pic>
         <p:nvPicPr>
-          <p:cNvPr id="3" name="Image 0" descr="/home/claude/deck-assets/healthy.png">    </p:cNvPr>
+          <p:cNvPr id="3" name="Image 0" descr="/home/claude/deck-assets/healthy.png"/>
           <p:cNvPicPr>
             <a:picLocks noChangeAspect="1"/>
           </p:cNvPicPr>
           <p:nvPr/>
         </p:nvPicPr>
         <p:blipFill>
-          <a:blip r:embed="rId1"/>
+          <a:blip r:embed="rId3"/>
           <a:stretch>
             <a:fillRect/>
           </a:stretch>
@@ -11352,6 +11392,13 @@
           </a:solidFill>
           <a:ln/>
         </p:spPr>
+        <p:txBody>
+          <a:bodyPr/>
+          <a:lstStyle/>
+          <a:p>
+            <a:endParaRPr lang="en-US"/>
+          </a:p>
+        </p:txBody>
       </p:sp>
       <p:sp>
         <p:nvSpPr>
@@ -11374,11 +11421,11 @@
           <a:bodyPr wrap="square" lIns="0" tIns="0" rIns="0" bIns="0" rtlCol="0" anchor="ctr"/>
           <a:lstStyle/>
           <a:p>
-            <a:pPr indent="0" marL="0">
-              <a:buNone/>
-            </a:pPr>
-            <a:r>
-              <a:rPr lang="en-US" sz="1000" b="1" spc="400" kern="0" dirty="0">
+            <a:pPr marL="0" indent="0">
+              <a:buNone/>
+            </a:pPr>
+            <a:r>
+              <a:rPr lang="en-US" sz="1000" b="1" kern="0" spc="400" dirty="0">
                 <a:solidFill>
                   <a:srgbClr val="CADCFC"/>
                 </a:solidFill>
@@ -11413,7 +11460,7 @@
           <a:bodyPr wrap="square" lIns="0" tIns="0" rIns="0" bIns="0" rtlCol="0" anchor="ctr"/>
           <a:lstStyle/>
           <a:p>
-            <a:pPr indent="0" marL="0">
+            <a:pPr marL="0" indent="0">
               <a:buNone/>
             </a:pPr>
             <a:r>
@@ -11452,7 +11499,7 @@
           <a:bodyPr wrap="square" lIns="0" tIns="0" rIns="0" bIns="0" rtlCol="0" anchor="ctr"/>
           <a:lstStyle/>
           <a:p>
-            <a:pPr indent="0" marL="0">
+            <a:pPr marL="0" indent="0">
               <a:buNone/>
             </a:pPr>
             <a:r>
@@ -11489,6 +11536,13 @@
           </a:solidFill>
           <a:ln/>
         </p:spPr>
+        <p:txBody>
+          <a:bodyPr/>
+          <a:lstStyle/>
+          <a:p>
+            <a:endParaRPr lang="en-US"/>
+          </a:p>
+        </p:txBody>
       </p:sp>
       <p:sp>
         <p:nvSpPr>
@@ -11511,7 +11565,7 @@
           <a:bodyPr wrap="square" lIns="0" tIns="0" rIns="0" bIns="0" rtlCol="0" anchor="ctr"/>
           <a:lstStyle/>
           <a:p>
-            <a:pPr indent="0" marL="0">
+            <a:pPr marL="0" indent="0">
               <a:buNone/>
             </a:pPr>
             <a:r>
@@ -11550,7 +11604,7 @@
           <a:bodyPr wrap="square" lIns="0" tIns="0" rIns="0" bIns="0" rtlCol="0" anchor="ctr"/>
           <a:lstStyle/>
           <a:p>
-            <a:pPr indent="0" marL="0">
+            <a:pPr marL="0" indent="0">
               <a:buNone/>
             </a:pPr>
             <a:r>
@@ -11589,7 +11643,7 @@
           <a:bodyPr wrap="square" lIns="0" tIns="0" rIns="0" bIns="0" rtlCol="0" anchor="ctr"/>
           <a:lstStyle/>
           <a:p>
-            <a:pPr indent="0" marL="0">
+            <a:pPr marL="0" indent="0">
               <a:buNone/>
             </a:pPr>
             <a:r>
@@ -11628,7 +11682,7 @@
           <a:bodyPr wrap="square" lIns="0" tIns="0" rIns="0" bIns="0" rtlCol="0" anchor="ctr"/>
           <a:lstStyle/>
           <a:p>
-            <a:pPr indent="0" marL="0">
+            <a:pPr marL="0" indent="0">
               <a:buNone/>
             </a:pPr>
             <a:r>
@@ -11667,7 +11721,7 @@
           <a:bodyPr wrap="square" lIns="0" tIns="0" rIns="0" bIns="0" rtlCol="0" anchor="ctr"/>
           <a:lstStyle/>
           <a:p>
-            <a:pPr indent="0" marL="0">
+            <a:pPr marL="0" indent="0">
               <a:buNone/>
             </a:pPr>
             <a:r>
@@ -11706,7 +11760,7 @@
           <a:bodyPr wrap="square" lIns="0" tIns="0" rIns="0" bIns="0" rtlCol="0" anchor="ctr"/>
           <a:lstStyle/>
           <a:p>
-            <a:pPr indent="0" marL="0">
+            <a:pPr marL="0" indent="0">
               <a:buNone/>
             </a:pPr>
             <a:r>
@@ -11745,7 +11799,7 @@
           <a:bodyPr wrap="square" lIns="0" tIns="0" rIns="0" bIns="0" rtlCol="0" anchor="ctr"/>
           <a:lstStyle/>
           <a:p>
-            <a:pPr algn="r" indent="0" marL="0">
+            <a:pPr marL="0" indent="0" algn="r">
               <a:buNone/>
             </a:pPr>
             <a:r>
@@ -12064,4 +12118,319 @@
     </a:ext>
   </a:extLst>
 </a:theme>
+</file>
+
+<file path=ppt/theme/theme2.xml><?xml version="1.0" encoding="utf-8"?>
+<a:theme xmlns:a="http://schemas.openxmlformats.org/drawingml/2006/main" name="Office Theme">
+  <a:themeElements>
+    <a:clrScheme name="Office">
+      <a:dk1>
+        <a:sysClr val="windowText" lastClr="000000"/>
+      </a:dk1>
+      <a:lt1>
+        <a:sysClr val="window" lastClr="FFFFFF"/>
+      </a:lt1>
+      <a:dk2>
+        <a:srgbClr val="0E2841"/>
+      </a:dk2>
+      <a:lt2>
+        <a:srgbClr val="E8E8E8"/>
+      </a:lt2>
+      <a:accent1>
+        <a:srgbClr val="156082"/>
+      </a:accent1>
+      <a:accent2>
+        <a:srgbClr val="E97132"/>
+      </a:accent2>
+      <a:accent3>
+        <a:srgbClr val="196B24"/>
+      </a:accent3>
+      <a:accent4>
+        <a:srgbClr val="0F9ED5"/>
+      </a:accent4>
+      <a:accent5>
+        <a:srgbClr val="A02B93"/>
+      </a:accent5>
+      <a:accent6>
+        <a:srgbClr val="4EA72E"/>
+      </a:accent6>
+      <a:hlink>
+        <a:srgbClr val="467886"/>
+      </a:hlink>
+      <a:folHlink>
+        <a:srgbClr val="96607D"/>
+      </a:folHlink>
+    </a:clrScheme>
+    <a:fontScheme name="Office">
+      <a:majorFont>
+        <a:latin typeface="Aptos Display" panose="02110004020202020204"/>
+        <a:ea typeface=""/>
+        <a:cs typeface=""/>
+        <a:font script="Jpan" typeface="游ゴシック Light"/>
+        <a:font script="Hang" typeface="맑은 고딕"/>
+        <a:font script="Hans" typeface="等线 Light"/>
+        <a:font script="Hant" typeface="新細明體"/>
+        <a:font script="Arab" typeface="Times New Roman"/>
+        <a:font script="Hebr" typeface="Times New Roman"/>
+        <a:font script="Thai" typeface="Angsana New"/>
+        <a:font script="Ethi" typeface="Nyala"/>
+        <a:font script="Beng" typeface="Vrinda"/>
+        <a:font script="Gujr" typeface="Shruti"/>
+        <a:font script="Khmr" typeface="MoolBoran"/>
+        <a:font script="Knda" typeface="Tunga"/>
+        <a:font script="Guru" typeface="Raavi"/>
+        <a:font script="Cans" typeface="Euphemia"/>
+        <a:font script="Cher" typeface="Plantagenet Cherokee"/>
+        <a:font script="Yiii" typeface="Microsoft Yi Baiti"/>
+        <a:font script="Tibt" typeface="Microsoft Himalaya"/>
+        <a:font script="Thaa" typeface="MV Boli"/>
+        <a:font script="Deva" typeface="Mangal"/>
+        <a:font script="Telu" typeface="Gautami"/>
+        <a:font script="Taml" typeface="Latha"/>
+        <a:font script="Syrc" typeface="Estrangelo Edessa"/>
+        <a:font script="Orya" typeface="Kalinga"/>
+        <a:font script="Mlym" typeface="Kartika"/>
+        <a:font script="Laoo" typeface="DokChampa"/>
+        <a:font script="Sinh" typeface="Iskoola Pota"/>
+        <a:font script="Mong" typeface="Mongolian Baiti"/>
+        <a:font script="Viet" typeface="Times New Roman"/>
+        <a:font script="Uigh" typeface="Microsoft Uighur"/>
+        <a:font script="Geor" typeface="Sylfaen"/>
+        <a:font script="Armn" typeface="Arial"/>
+        <a:font script="Bugi" typeface="Leelawadee UI"/>
+        <a:font script="Bopo" typeface="Microsoft JhengHei"/>
+        <a:font script="Java" typeface="Javanese Text"/>
+        <a:font script="Lisu" typeface="Segoe UI"/>
+        <a:font script="Mymr" typeface="Myanmar Text"/>
+        <a:font script="Nkoo" typeface="Ebrima"/>
+        <a:font script="Olck" typeface="Nirmala UI"/>
+        <a:font script="Osma" typeface="Ebrima"/>
+        <a:font script="Phag" typeface="Phagspa"/>
+        <a:font script="Syrn" typeface="Estrangelo Edessa"/>
+        <a:font script="Syrj" typeface="Estrangelo Edessa"/>
+        <a:font script="Syre" typeface="Estrangelo Edessa"/>
+        <a:font script="Sora" typeface="Nirmala UI"/>
+        <a:font script="Tale" typeface="Microsoft Tai Le"/>
+        <a:font script="Talu" typeface="Microsoft New Tai Lue"/>
+        <a:font script="Tfng" typeface="Ebrima"/>
+      </a:majorFont>
+      <a:minorFont>
+        <a:latin typeface="Aptos" panose="02110004020202020204"/>
+        <a:ea typeface=""/>
+        <a:cs typeface=""/>
+        <a:font script="Jpan" typeface="游ゴシック"/>
+        <a:font script="Hang" typeface="맑은 고딕"/>
+        <a:font script="Hans" typeface="等线"/>
+        <a:font script="Hant" typeface="新細明體"/>
+        <a:font script="Arab" typeface="Arial"/>
+        <a:font script="Hebr" typeface="Arial"/>
+        <a:font script="Thai" typeface="Cordia New"/>
+        <a:font script="Ethi" typeface="Nyala"/>
+        <a:font script="Beng" typeface="Vrinda"/>
+        <a:font script="Gujr" typeface="Shruti"/>
+        <a:font script="Khmr" typeface="DaunPenh"/>
+        <a:font script="Knda" typeface="Tunga"/>
+        <a:font script="Guru" typeface="Raavi"/>
+        <a:font script="Cans" typeface="Euphemia"/>
+        <a:font script="Cher" typeface="Plantagenet Cherokee"/>
+        <a:font script="Yiii" typeface="Microsoft Yi Baiti"/>
+        <a:font script="Tibt" typeface="Microsoft Himalaya"/>
+        <a:font script="Thaa" typeface="MV Boli"/>
+        <a:font script="Deva" typeface="Mangal"/>
+        <a:font script="Telu" typeface="Gautami"/>
+        <a:font script="Taml" typeface="Latha"/>
+        <a:font script="Syrc" typeface="Estrangelo Edessa"/>
+        <a:font script="Orya" typeface="Kalinga"/>
+        <a:font script="Mlym" typeface="Kartika"/>
+        <a:font script="Laoo" typeface="DokChampa"/>
+        <a:font script="Sinh" typeface="Iskoola Pota"/>
+        <a:font script="Mong" typeface="Mongolian Baiti"/>
+        <a:font script="Viet" typeface="Arial"/>
+        <a:font script="Uigh" typeface="Microsoft Uighur"/>
+        <a:font script="Geor" typeface="Sylfaen"/>
+        <a:font script="Armn" typeface="Arial"/>
+        <a:font script="Bugi" typeface="Leelawadee UI"/>
+        <a:font script="Bopo" typeface="Microsoft JhengHei"/>
+        <a:font script="Java" typeface="Javanese Text"/>
+        <a:font script="Lisu" typeface="Segoe UI"/>
+        <a:font script="Mymr" typeface="Myanmar Text"/>
+        <a:font script="Nkoo" typeface="Ebrima"/>
+        <a:font script="Olck" typeface="Nirmala UI"/>
+        <a:font script="Osma" typeface="Ebrima"/>
+        <a:font script="Phag" typeface="Phagspa"/>
+        <a:font script="Syrn" typeface="Estrangelo Edessa"/>
+        <a:font script="Syrj" typeface="Estrangelo Edessa"/>
+        <a:font script="Syre" typeface="Estrangelo Edessa"/>
+        <a:font script="Sora" typeface="Nirmala UI"/>
+        <a:font script="Tale" typeface="Microsoft Tai Le"/>
+        <a:font script="Talu" typeface="Microsoft New Tai Lue"/>
+        <a:font script="Tfng" typeface="Ebrima"/>
+      </a:minorFont>
+    </a:fontScheme>
+    <a:fmtScheme name="Office">
+      <a:fillStyleLst>
+        <a:solidFill>
+          <a:schemeClr val="phClr"/>
+        </a:solidFill>
+        <a:gradFill rotWithShape="1">
+          <a:gsLst>
+            <a:gs pos="0">
+              <a:schemeClr val="phClr">
+                <a:lumMod val="110000"/>
+                <a:satMod val="105000"/>
+                <a:tint val="67000"/>
+              </a:schemeClr>
+            </a:gs>
+            <a:gs pos="50000">
+              <a:schemeClr val="phClr">
+                <a:lumMod val="105000"/>
+                <a:satMod val="103000"/>
+                <a:tint val="73000"/>
+              </a:schemeClr>
+            </a:gs>
+            <a:gs pos="100000">
+              <a:schemeClr val="phClr">
+                <a:lumMod val="105000"/>
+                <a:satMod val="109000"/>
+                <a:tint val="81000"/>
+              </a:schemeClr>
+            </a:gs>
+          </a:gsLst>
+          <a:lin ang="5400000" scaled="0"/>
+        </a:gradFill>
+        <a:gradFill rotWithShape="1">
+          <a:gsLst>
+            <a:gs pos="0">
+              <a:schemeClr val="phClr">
+                <a:satMod val="103000"/>
+                <a:lumMod val="102000"/>
+                <a:tint val="94000"/>
+              </a:schemeClr>
+            </a:gs>
+            <a:gs pos="50000">
+              <a:schemeClr val="phClr">
+                <a:satMod val="110000"/>
+                <a:lumMod val="100000"/>
+                <a:shade val="100000"/>
+              </a:schemeClr>
+            </a:gs>
+            <a:gs pos="100000">
+              <a:schemeClr val="phClr">
+                <a:lumMod val="99000"/>
+                <a:satMod val="120000"/>
+                <a:shade val="78000"/>
+              </a:schemeClr>
+            </a:gs>
+          </a:gsLst>
+          <a:lin ang="5400000" scaled="0"/>
+        </a:gradFill>
+      </a:fillStyleLst>
+      <a:lnStyleLst>
+        <a:ln w="12700" cap="flat" cmpd="sng" algn="ctr">
+          <a:solidFill>
+            <a:schemeClr val="phClr"/>
+          </a:solidFill>
+          <a:prstDash val="solid"/>
+          <a:miter lim="800000"/>
+        </a:ln>
+        <a:ln w="19050" cap="flat" cmpd="sng" algn="ctr">
+          <a:solidFill>
+            <a:schemeClr val="phClr"/>
+          </a:solidFill>
+          <a:prstDash val="solid"/>
+          <a:miter lim="800000"/>
+        </a:ln>
+        <a:ln w="25400" cap="flat" cmpd="sng" algn="ctr">
+          <a:solidFill>
+            <a:schemeClr val="phClr"/>
+          </a:solidFill>
+          <a:prstDash val="solid"/>
+          <a:miter lim="800000"/>
+        </a:ln>
+      </a:lnStyleLst>
+      <a:effectStyleLst>
+        <a:effectStyle>
+          <a:effectLst/>
+        </a:effectStyle>
+        <a:effectStyle>
+          <a:effectLst/>
+        </a:effectStyle>
+        <a:effectStyle>
+          <a:effectLst>
+            <a:outerShdw blurRad="57150" dist="19050" dir="5400000" algn="ctr" rotWithShape="0">
+              <a:srgbClr val="000000">
+                <a:alpha val="63000"/>
+              </a:srgbClr>
+            </a:outerShdw>
+          </a:effectLst>
+        </a:effectStyle>
+      </a:effectStyleLst>
+      <a:bgFillStyleLst>
+        <a:solidFill>
+          <a:schemeClr val="phClr"/>
+        </a:solidFill>
+        <a:solidFill>
+          <a:schemeClr val="phClr">
+            <a:tint val="95000"/>
+            <a:satMod val="170000"/>
+          </a:schemeClr>
+        </a:solidFill>
+        <a:gradFill rotWithShape="1">
+          <a:gsLst>
+            <a:gs pos="0">
+              <a:schemeClr val="phClr">
+                <a:tint val="93000"/>
+                <a:satMod val="150000"/>
+                <a:shade val="98000"/>
+                <a:lumMod val="102000"/>
+              </a:schemeClr>
+            </a:gs>
+            <a:gs pos="50000">
+              <a:schemeClr val="phClr">
+                <a:tint val="98000"/>
+                <a:satMod val="130000"/>
+                <a:shade val="90000"/>
+                <a:lumMod val="103000"/>
+              </a:schemeClr>
+            </a:gs>
+            <a:gs pos="100000">
+              <a:schemeClr val="phClr">
+                <a:shade val="63000"/>
+                <a:satMod val="120000"/>
+              </a:schemeClr>
+            </a:gs>
+          </a:gsLst>
+          <a:lin ang="5400000" scaled="0"/>
+        </a:gradFill>
+      </a:bgFillStyleLst>
+    </a:fmtScheme>
+  </a:themeElements>
+  <a:objectDefaults>
+    <a:lnDef>
+      <a:spPr/>
+      <a:bodyPr/>
+      <a:lstStyle/>
+      <a:style>
+        <a:lnRef idx="2">
+          <a:schemeClr val="accent1"/>
+        </a:lnRef>
+        <a:fillRef idx="0">
+          <a:schemeClr val="accent1"/>
+        </a:fillRef>
+        <a:effectRef idx="1">
+          <a:schemeClr val="accent1"/>
+        </a:effectRef>
+        <a:fontRef idx="minor">
+          <a:schemeClr val="tx1"/>
+        </a:fontRef>
+      </a:style>
+    </a:lnDef>
+  </a:objectDefaults>
+  <a:extraClrSchemeLst/>
+  <a:extLst>
+    <a:ext uri="{05A4C25C-085E-4340-85A3-A5531E510DB2}">
+      <thm15:themeFamily xmlns:thm15="http://schemas.microsoft.com/office/thememl/2012/main" name="Office Theme" id="{2E142A2C-CD16-42D6-873A-C26D2A0506FA}" vid="{1BDDFF52-6CD6-40A5-AB3C-68EB2F1E4D0A}"/>
+    </a:ext>
+  </a:extLst>
+</a:theme>
 </file>